--- a/论文ppt/参考/522022320081_李云飞_预答辩_ 20240515.pptx
+++ b/论文ppt/参考/522022320081_李云飞_预答辩_ 20240515.pptx
@@ -5,32 +5,32 @@
     <p:sldMasterId id="2147483648" r:id="rId1"/>
   </p:sldMasterIdLst>
   <p:notesMasterIdLst>
-    <p:notesMasterId r:id="rId4"/>
+    <p:notesMasterId r:id="rId20"/>
   </p:notesMasterIdLst>
   <p:sldIdLst>
-    <p:sldId id="257" r:id="rId3"/>
-    <p:sldId id="284" r:id="rId5"/>
-    <p:sldId id="266" r:id="rId6"/>
-    <p:sldId id="285" r:id="rId7"/>
-    <p:sldId id="286" r:id="rId8"/>
-    <p:sldId id="287" r:id="rId9"/>
-    <p:sldId id="288" r:id="rId10"/>
-    <p:sldId id="331" r:id="rId11"/>
-    <p:sldId id="293" r:id="rId12"/>
-    <p:sldId id="330" r:id="rId13"/>
-    <p:sldId id="290" r:id="rId14"/>
-    <p:sldId id="341" r:id="rId15"/>
-    <p:sldId id="299" r:id="rId16"/>
-    <p:sldId id="298" r:id="rId17"/>
-    <p:sldId id="340" r:id="rId18"/>
-    <p:sldId id="300" r:id="rId19"/>
-    <p:sldId id="301" r:id="rId20"/>
-    <p:sldId id="329" r:id="rId21"/>
+    <p:sldId id="257" r:id="rId2"/>
+    <p:sldId id="284" r:id="rId3"/>
+    <p:sldId id="266" r:id="rId4"/>
+    <p:sldId id="285" r:id="rId5"/>
+    <p:sldId id="286" r:id="rId6"/>
+    <p:sldId id="287" r:id="rId7"/>
+    <p:sldId id="288" r:id="rId8"/>
+    <p:sldId id="331" r:id="rId9"/>
+    <p:sldId id="293" r:id="rId10"/>
+    <p:sldId id="330" r:id="rId11"/>
+    <p:sldId id="290" r:id="rId12"/>
+    <p:sldId id="341" r:id="rId13"/>
+    <p:sldId id="299" r:id="rId14"/>
+    <p:sldId id="298" r:id="rId15"/>
+    <p:sldId id="340" r:id="rId16"/>
+    <p:sldId id="300" r:id="rId17"/>
+    <p:sldId id="301" r:id="rId18"/>
+    <p:sldId id="329" r:id="rId19"/>
   </p:sldIdLst>
   <p:sldSz cx="12192000" cy="6858000"/>
   <p:notesSz cx="6858000" cy="9144000"/>
   <p:custDataLst>
-    <p:tags r:id="rId25"/>
+    <p:tags r:id="rId21"/>
   </p:custDataLst>
   <p:defaultTextStyle>
     <a:defPPr>
@@ -127,6 +127,11 @@
       </a:defRPr>
     </a:lvl9pPr>
   </p:defaultTextStyle>
+  <p:extLst>
+    <p:ext uri="{EFAFB233-063F-42B5-8137-9DF3F51BA10A}">
+      <p15:sldGuideLst xmlns:p15="http://schemas.microsoft.com/office/powerpoint/2012/main"/>
+    </p:ext>
+  </p:extLst>
 </p:presentation>
 </file>
 
@@ -140,8 +145,8 @@
           <inkml:channel name="Y" type="integer" units="cm"/>
         </inkml:traceFormat>
         <inkml:channelProperties>
-          <inkml:channelProperty channel="X" name="resolution" value="28.3464566929134" units="1/cm"/>
-          <inkml:channelProperty channel="Y" name="resolution" value="28.3464566929134" units="1/cm"/>
+          <inkml:channelProperty channel="X" name="resolution" value="28.34646" units="1/cm"/>
+          <inkml:channelProperty channel="Y" name="resolution" value="28.34646" units="1/cm"/>
         </inkml:channelProperties>
       </inkml:inkSource>
       <inkml:timestamp xml:id="ts0" timeString="2024-03-29T18:56:00"/>
@@ -149,11 +154,10 @@
     <inkml:brush xml:id="br0">
       <inkml:brushProperty name="width" value="0.05292" units="cm"/>
       <inkml:brushProperty name="height" value="0.05292" units="cm"/>
-      <inkml:brushProperty name="color" value="#f80600"/>
-      <inkml:brushProperty name="ignorePressure" value="0"/>
+      <inkml:brushProperty name="color" value="#F80600"/>
     </inkml:brush>
   </inkml:definitions>
-  <inkml:trace contextRef="#ctx0" brushRef="#br0">4386.59 8168.76,'0'0</inkml:trace>
+  <inkml:trace contextRef="#ctx0" brushRef="#br0">4386 8168,'0'0</inkml:trace>
 </inkml:ink>
 </file>
 
@@ -167,8 +171,8 @@
           <inkml:channel name="Y" type="integer" units="cm"/>
         </inkml:traceFormat>
         <inkml:channelProperties>
-          <inkml:channelProperty channel="X" name="resolution" value="28.3464566929134" units="1/cm"/>
-          <inkml:channelProperty channel="Y" name="resolution" value="28.3464566929134" units="1/cm"/>
+          <inkml:channelProperty channel="X" name="resolution" value="28.34646" units="1/cm"/>
+          <inkml:channelProperty channel="Y" name="resolution" value="28.34646" units="1/cm"/>
         </inkml:channelProperties>
       </inkml:inkSource>
       <inkml:timestamp xml:id="ts0" timeString="2024-03-29T18:56:00"/>
@@ -176,11 +180,10 @@
     <inkml:brush xml:id="br0">
       <inkml:brushProperty name="width" value="0.05292" units="cm"/>
       <inkml:brushProperty name="height" value="0.05292" units="cm"/>
-      <inkml:brushProperty name="color" value="#f80600"/>
-      <inkml:brushProperty name="ignorePressure" value="0"/>
+      <inkml:brushProperty name="color" value="#F80600"/>
     </inkml:brush>
   </inkml:definitions>
-  <inkml:trace contextRef="#ctx0" brushRef="#br0">4151.59 8233.76,'0'0</inkml:trace>
+  <inkml:trace contextRef="#ctx0" brushRef="#br0">4151 8233,'0'0</inkml:trace>
 </inkml:ink>
 </file>
 
@@ -194,8 +197,8 @@
           <inkml:channel name="Y" type="integer" units="cm"/>
         </inkml:traceFormat>
         <inkml:channelProperties>
-          <inkml:channelProperty channel="X" name="resolution" value="28.3464566929134" units="1/cm"/>
-          <inkml:channelProperty channel="Y" name="resolution" value="28.3464566929134" units="1/cm"/>
+          <inkml:channelProperty channel="X" name="resolution" value="28.34646" units="1/cm"/>
+          <inkml:channelProperty channel="Y" name="resolution" value="28.34646" units="1/cm"/>
         </inkml:channelProperties>
       </inkml:inkSource>
       <inkml:timestamp xml:id="ts0" timeString="2024-03-29T18:56:00"/>
@@ -203,11 +206,10 @@
     <inkml:brush xml:id="br0">
       <inkml:brushProperty name="width" value="0.05292" units="cm"/>
       <inkml:brushProperty name="height" value="0.05292" units="cm"/>
-      <inkml:brushProperty name="color" value="#f80600"/>
-      <inkml:brushProperty name="ignorePressure" value="0"/>
+      <inkml:brushProperty name="color" value="#F80600"/>
     </inkml:brush>
   </inkml:definitions>
-  <inkml:trace contextRef="#ctx0" brushRef="#br0">12365.6 5734.76,'0'0</inkml:trace>
+  <inkml:trace contextRef="#ctx0" brushRef="#br0">12365 5734,'0'0</inkml:trace>
 </inkml:ink>
 </file>
 
@@ -221,8 +223,8 @@
           <inkml:channel name="Y" type="integer" units="cm"/>
         </inkml:traceFormat>
         <inkml:channelProperties>
-          <inkml:channelProperty channel="X" name="resolution" value="28.3464566929134" units="1/cm"/>
-          <inkml:channelProperty channel="Y" name="resolution" value="28.3464566929134" units="1/cm"/>
+          <inkml:channelProperty channel="X" name="resolution" value="28.34646" units="1/cm"/>
+          <inkml:channelProperty channel="Y" name="resolution" value="28.34646" units="1/cm"/>
         </inkml:channelProperties>
       </inkml:inkSource>
       <inkml:timestamp xml:id="ts0" timeString="2024-03-29T18:56:00"/>
@@ -230,11 +232,10 @@
     <inkml:brush xml:id="br0">
       <inkml:brushProperty name="width" value="0.05292" units="cm"/>
       <inkml:brushProperty name="height" value="0.05292" units="cm"/>
-      <inkml:brushProperty name="color" value="#f80600"/>
-      <inkml:brushProperty name="ignorePressure" value="0"/>
+      <inkml:brushProperty name="color" value="#F80600"/>
     </inkml:brush>
   </inkml:definitions>
-  <inkml:trace contextRef="#ctx0" brushRef="#br0">13211.6 5499.76,'0'0</inkml:trace>
+  <inkml:trace contextRef="#ctx0" brushRef="#br0">13211 5499,'0'0</inkml:trace>
 </inkml:ink>
 </file>
 
@@ -248,8 +249,8 @@
           <inkml:channel name="Y" type="integer" units="cm"/>
         </inkml:traceFormat>
         <inkml:channelProperties>
-          <inkml:channelProperty channel="X" name="resolution" value="28.3464566929134" units="1/cm"/>
-          <inkml:channelProperty channel="Y" name="resolution" value="28.3464566929134" units="1/cm"/>
+          <inkml:channelProperty channel="X" name="resolution" value="28.34646" units="1/cm"/>
+          <inkml:channelProperty channel="Y" name="resolution" value="28.34646" units="1/cm"/>
         </inkml:channelProperties>
       </inkml:inkSource>
       <inkml:timestamp xml:id="ts0" timeString="2024-03-29T18:56:00"/>
@@ -257,11 +258,10 @@
     <inkml:brush xml:id="br0">
       <inkml:brushProperty name="width" value="0.05292" units="cm"/>
       <inkml:brushProperty name="height" value="0.05292" units="cm"/>
-      <inkml:brushProperty name="color" value="#f80600"/>
-      <inkml:brushProperty name="ignorePressure" value="0"/>
+      <inkml:brushProperty name="color" value="#F80600"/>
     </inkml:brush>
   </inkml:definitions>
-  <inkml:trace contextRef="#ctx0" brushRef="#br0">13914.6 4627.76,'0'0</inkml:trace>
+  <inkml:trace contextRef="#ctx0" brushRef="#br0">13914 4627,'0'0</inkml:trace>
 </inkml:ink>
 </file>
 
@@ -347,6 +347,7 @@
           <a:p>
             <a:fld id="{0AFED317-A77B-4EE4-AFE9-C3EEF805DE51}" type="datetimeFigureOut">
               <a:rPr lang="zh-CN" altLang="en-US" smtClean="0"/>
+              <a:t>2026/5/14</a:t>
             </a:fld>
             <a:endParaRPr lang="zh-CN" altLang="en-US"/>
           </a:p>
@@ -413,7 +414,6 @@
               <a:rPr lang="zh-CN" altLang="en-US"/>
               <a:t>单击此处编辑母版文本样式</a:t>
             </a:r>
-            <a:endParaRPr lang="zh-CN" altLang="en-US"/>
           </a:p>
           <a:p>
             <a:pPr lvl="1"/>
@@ -421,7 +421,6 @@
               <a:rPr lang="zh-CN" altLang="en-US"/>
               <a:t>二级</a:t>
             </a:r>
-            <a:endParaRPr lang="zh-CN" altLang="en-US"/>
           </a:p>
           <a:p>
             <a:pPr lvl="2"/>
@@ -429,7 +428,6 @@
               <a:rPr lang="zh-CN" altLang="en-US"/>
               <a:t>三级</a:t>
             </a:r>
-            <a:endParaRPr lang="zh-CN" altLang="en-US"/>
           </a:p>
           <a:p>
             <a:pPr lvl="3"/>
@@ -437,7 +435,6 @@
               <a:rPr lang="zh-CN" altLang="en-US"/>
               <a:t>四级</a:t>
             </a:r>
-            <a:endParaRPr lang="zh-CN" altLang="en-US"/>
           </a:p>
           <a:p>
             <a:pPr lvl="4"/>
@@ -445,7 +442,6 @@
               <a:rPr lang="zh-CN" altLang="en-US"/>
               <a:t>五级</a:t>
             </a:r>
-            <a:endParaRPr lang="zh-CN" altLang="en-US"/>
           </a:p>
         </p:txBody>
       </p:sp>
@@ -509,6 +505,7 @@
           <a:p>
             <a:fld id="{10091C4A-6211-45E0-9094-07889331A92A}" type="slidenum">
               <a:rPr lang="zh-CN" altLang="en-US" smtClean="0"/>
+              <a:t>‹#›</a:t>
             </a:fld>
             <a:endParaRPr lang="zh-CN" altLang="en-US"/>
           </a:p>
@@ -666,12 +663,6 @@
               </a:rPr>
               <a:t>各位评审老师好，我是李云飞，我的答辩题目是《》。</a:t>
             </a:r>
-            <a:endParaRPr lang="zh-CN" altLang="zh-CN" sz="1800" kern="100" dirty="0">
-              <a:effectLst/>
-              <a:latin typeface="等线" panose="02010600030101010101" pitchFamily="2" charset="-122"/>
-              <a:ea typeface="等线" panose="02010600030101010101" pitchFamily="2" charset="-122"/>
-              <a:cs typeface="Times New Roman" panose="02020603050405020304" pitchFamily="18" charset="0"/>
-            </a:endParaRPr>
           </a:p>
           <a:p>
             <a:endParaRPr lang="zh-CN" altLang="en-US" dirty="0"/>
@@ -695,6 +686,7 @@
           <a:p>
             <a:fld id="{9D0D742A-9E91-468C-B0BA-D6E0DC135687}" type="slidenum">
               <a:rPr lang="zh-CN" altLang="en-US" smtClean="0"/>
+              <a:t>1</a:t>
             </a:fld>
             <a:endParaRPr lang="zh-CN" altLang="en-US"/>
           </a:p>
@@ -717,12 +709,19 @@
         <p:cNvGrpSpPr/>
         <p:nvPr/>
       </p:nvGrpSpPr>
-      <p:grpSpPr/>
+      <p:grpSpPr>
+        <a:xfrm>
+          <a:off x="0" y="0"/>
+          <a:ext cx="0" cy="0"/>
+          <a:chOff x="0" y="0"/>
+          <a:chExt cx="0" cy="0"/>
+        </a:xfrm>
+      </p:grpSpPr>
       <p:sp>
         <p:nvSpPr>
           <p:cNvPr id="2" name="幻灯片图像占位符 1"/>
           <p:cNvSpPr>
-            <a:spLocks noGrp="1"/>
+            <a:spLocks noGrp="1" noRot="1" noChangeAspect="1"/>
           </p:cNvSpPr>
           <p:nvPr>
             <p:ph type="sldImg" idx="2"/>
@@ -743,12 +742,12 @@
         <p:spPr/>
         <p:txBody>
           <a:bodyPr/>
+          <a:lstStyle/>
           <a:p>
             <a:r>
               <a:rPr lang="zh-CN" altLang="en-US"/>
               <a:t>本系统的架构设计采用分层设计。</a:t>
             </a:r>
-            <a:endParaRPr lang="zh-CN" altLang="en-US"/>
           </a:p>
           <a:p>
             <a:r>
@@ -826,7 +825,6 @@
               <a:rPr lang="zh-CN" altLang="en-US"/>
               <a:t>实现数据同步。</a:t>
             </a:r>
-            <a:endParaRPr lang="zh-CN" altLang="en-US"/>
           </a:p>
           <a:p>
             <a:r>
@@ -857,7 +855,6 @@
               <a:rPr lang="zh-CN" altLang="en-US"/>
               <a:t>实现日志数据的存储和全文检索。</a:t>
             </a:r>
-            <a:endParaRPr lang="zh-CN" altLang="en-US"/>
           </a:p>
           <a:p>
             <a:endParaRPr lang="zh-CN" altLang="en-US"/>
@@ -881,12 +878,19 @@
         <p:cNvGrpSpPr/>
         <p:nvPr/>
       </p:nvGrpSpPr>
-      <p:grpSpPr/>
+      <p:grpSpPr>
+        <a:xfrm>
+          <a:off x="0" y="0"/>
+          <a:ext cx="0" cy="0"/>
+          <a:chOff x="0" y="0"/>
+          <a:chExt cx="0" cy="0"/>
+        </a:xfrm>
+      </p:grpSpPr>
       <p:sp>
         <p:nvSpPr>
           <p:cNvPr id="2" name="幻灯片图像占位符 1"/>
           <p:cNvSpPr>
-            <a:spLocks noGrp="1"/>
+            <a:spLocks noGrp="1" noRot="1" noChangeAspect="1"/>
           </p:cNvSpPr>
           <p:nvPr>
             <p:ph type="sldImg" idx="2"/>
@@ -907,6 +911,7 @@
         <p:spPr/>
         <p:txBody>
           <a:bodyPr/>
+          <a:lstStyle/>
           <a:p>
             <a:r>
               <a:rPr lang="zh-CN" altLang="en-US">
@@ -959,9 +964,6 @@
               </a:rPr>
               <a:t>监控告警模块，负责对网关、机器节点的监控指标采集、查看分析、告警通知。</a:t>
             </a:r>
-            <a:endParaRPr lang="zh-CN" altLang="en-US">
-              <a:sym typeface="+mn-ea"/>
-            </a:endParaRPr>
           </a:p>
           <a:p>
             <a:r>
@@ -994,12 +996,19 @@
         <p:cNvGrpSpPr/>
         <p:nvPr/>
       </p:nvGrpSpPr>
-      <p:grpSpPr/>
+      <p:grpSpPr>
+        <a:xfrm>
+          <a:off x="0" y="0"/>
+          <a:ext cx="0" cy="0"/>
+          <a:chOff x="0" y="0"/>
+          <a:chExt cx="0" cy="0"/>
+        </a:xfrm>
+      </p:grpSpPr>
       <p:sp>
         <p:nvSpPr>
           <p:cNvPr id="2" name="幻灯片图像占位符 1"/>
           <p:cNvSpPr>
-            <a:spLocks noGrp="1"/>
+            <a:spLocks noGrp="1" noRot="1" noChangeAspect="1"/>
           </p:cNvSpPr>
           <p:nvPr>
             <p:ph type="sldImg" idx="2"/>
@@ -1020,19 +1029,18 @@
         <p:spPr/>
         <p:txBody>
           <a:bodyPr/>
+          <a:lstStyle/>
           <a:p>
             <a:r>
               <a:rPr lang="zh-CN" altLang="en-US"/>
               <a:t>数据库设计，左图展示了本系统的表结构和关系。</a:t>
             </a:r>
-            <a:endParaRPr lang="zh-CN" altLang="en-US"/>
           </a:p>
           <a:p>
             <a:r>
               <a:rPr lang="zh-CN" altLang="en-US"/>
               <a:t>右边三张表则展示了本系统的关键的表设计。分布为插件表、插件配置表、规则表。</a:t>
             </a:r>
-            <a:endParaRPr lang="zh-CN" altLang="en-US"/>
           </a:p>
           <a:p>
             <a:r>
@@ -1047,7 +1055,6 @@
               <a:rPr lang="zh-CN" altLang="en-US"/>
               <a:t>字段。</a:t>
             </a:r>
-            <a:endParaRPr lang="zh-CN" altLang="en-US"/>
           </a:p>
           <a:p>
             <a:r>
@@ -1114,7 +1121,6 @@
               <a:rPr lang="zh-CN" altLang="en-US" dirty="0"/>
               <a:t>第四部分，系统实现</a:t>
             </a:r>
-            <a:endParaRPr lang="zh-CN" altLang="en-US" dirty="0"/>
           </a:p>
         </p:txBody>
       </p:sp>
@@ -1135,6 +1141,7 @@
           <a:p>
             <a:fld id="{F8D2ECA3-E5F4-44CA-BF21-128C334BA455}" type="slidenum">
               <a:rPr lang="zh-CN" altLang="en-US" smtClean="0"/>
+              <a:t>13</a:t>
             </a:fld>
             <a:endParaRPr lang="zh-CN" altLang="en-US"/>
           </a:p>
@@ -1157,12 +1164,19 @@
         <p:cNvGrpSpPr/>
         <p:nvPr/>
       </p:nvGrpSpPr>
-      <p:grpSpPr/>
+      <p:grpSpPr>
+        <a:xfrm>
+          <a:off x="0" y="0"/>
+          <a:ext cx="0" cy="0"/>
+          <a:chOff x="0" y="0"/>
+          <a:chExt cx="0" cy="0"/>
+        </a:xfrm>
+      </p:grpSpPr>
       <p:sp>
         <p:nvSpPr>
           <p:cNvPr id="2" name="幻灯片图像占位符 1"/>
           <p:cNvSpPr>
-            <a:spLocks noGrp="1"/>
+            <a:spLocks noGrp="1" noRot="1" noChangeAspect="1"/>
           </p:cNvSpPr>
           <p:nvPr>
             <p:ph type="sldImg" idx="2"/>
@@ -1183,6 +1197,7 @@
         <p:spPr/>
         <p:txBody>
           <a:bodyPr/>
+          <a:lstStyle/>
           <a:p>
             <a:r>
               <a:rPr lang="zh-CN" altLang="en-US"/>
@@ -1228,7 +1243,6 @@
               <a:rPr lang="zh-CN" altLang="en-US"/>
               <a:t>的服务代理及其协议转换的能力。</a:t>
             </a:r>
-            <a:endParaRPr lang="zh-CN" altLang="en-US"/>
           </a:p>
         </p:txBody>
       </p:sp>
@@ -1249,12 +1263,19 @@
         <p:cNvGrpSpPr/>
         <p:nvPr/>
       </p:nvGrpSpPr>
-      <p:grpSpPr/>
+      <p:grpSpPr>
+        <a:xfrm>
+          <a:off x="0" y="0"/>
+          <a:ext cx="0" cy="0"/>
+          <a:chOff x="0" y="0"/>
+          <a:chExt cx="0" cy="0"/>
+        </a:xfrm>
+      </p:grpSpPr>
       <p:sp>
         <p:nvSpPr>
           <p:cNvPr id="2" name="幻灯片图像占位符 1"/>
           <p:cNvSpPr>
-            <a:spLocks noGrp="1"/>
+            <a:spLocks noGrp="1" noRot="1" noChangeAspect="1"/>
           </p:cNvSpPr>
           <p:nvPr>
             <p:ph type="sldImg" idx="2"/>
@@ -1275,12 +1296,12 @@
         <p:spPr/>
         <p:txBody>
           <a:bodyPr/>
+          <a:lstStyle/>
           <a:p>
             <a:r>
               <a:rPr lang="zh-CN" altLang="en-US"/>
               <a:t>左表两张表展示了直接访问业务服务和通过服务访问的压测情况，右边图展示了对比常见开源组件，本网关的平均响应耗时情况。展示了本系统的性能表现</a:t>
             </a:r>
-            <a:endParaRPr lang="zh-CN" altLang="en-US"/>
           </a:p>
         </p:txBody>
       </p:sp>
@@ -1301,12 +1322,19 @@
         <p:cNvGrpSpPr/>
         <p:nvPr/>
       </p:nvGrpSpPr>
-      <p:grpSpPr/>
+      <p:grpSpPr>
+        <a:xfrm>
+          <a:off x="0" y="0"/>
+          <a:ext cx="0" cy="0"/>
+          <a:chOff x="0" y="0"/>
+          <a:chExt cx="0" cy="0"/>
+        </a:xfrm>
+      </p:grpSpPr>
       <p:sp>
         <p:nvSpPr>
           <p:cNvPr id="2" name="幻灯片图像占位符 1"/>
           <p:cNvSpPr>
-            <a:spLocks noGrp="1"/>
+            <a:spLocks noGrp="1" noRot="1" noChangeAspect="1"/>
           </p:cNvSpPr>
           <p:nvPr>
             <p:ph type="sldImg" idx="2"/>
@@ -1327,19 +1355,18 @@
         <p:spPr/>
         <p:txBody>
           <a:bodyPr/>
+          <a:lstStyle/>
           <a:p>
             <a:r>
               <a:rPr lang="zh-CN" altLang="en-US"/>
               <a:t>运维管理：</a:t>
             </a:r>
-            <a:endParaRPr lang="zh-CN" altLang="en-US"/>
           </a:p>
           <a:p>
             <a:r>
               <a:rPr lang="zh-CN" altLang="en-US"/>
               <a:t>左上图展示了服务列表的效果图，左下图则展示了插件的基本信息情况列表。</a:t>
             </a:r>
-            <a:endParaRPr lang="zh-CN" altLang="en-US"/>
           </a:p>
           <a:p>
             <a:r>
@@ -1374,7 +1401,6 @@
               <a:rPr lang="zh-CN" altLang="en-US"/>
               <a:t>接口配置规则实现插件过滤的能力</a:t>
             </a:r>
-            <a:endParaRPr lang="zh-CN" altLang="en-US"/>
           </a:p>
         </p:txBody>
       </p:sp>
@@ -1395,12 +1421,19 @@
         <p:cNvGrpSpPr/>
         <p:nvPr/>
       </p:nvGrpSpPr>
-      <p:grpSpPr/>
+      <p:grpSpPr>
+        <a:xfrm>
+          <a:off x="0" y="0"/>
+          <a:ext cx="0" cy="0"/>
+          <a:chOff x="0" y="0"/>
+          <a:chExt cx="0" cy="0"/>
+        </a:xfrm>
+      </p:grpSpPr>
       <p:sp>
         <p:nvSpPr>
           <p:cNvPr id="2" name="幻灯片图像占位符 1"/>
           <p:cNvSpPr>
-            <a:spLocks noGrp="1"/>
+            <a:spLocks noGrp="1" noRot="1" noChangeAspect="1"/>
           </p:cNvSpPr>
           <p:nvPr>
             <p:ph type="sldImg" idx="2"/>
@@ -1421,12 +1454,12 @@
         <p:spPr/>
         <p:txBody>
           <a:bodyPr/>
+          <a:lstStyle/>
           <a:p>
             <a:r>
               <a:rPr lang="zh-CN" altLang="en-US"/>
               <a:t>监控告警，</a:t>
             </a:r>
-            <a:endParaRPr lang="zh-CN" altLang="en-US"/>
           </a:p>
           <a:p>
             <a:r>
@@ -1449,7 +1482,6 @@
               <a:rPr lang="zh-CN" altLang="en-US"/>
               <a:t>调用统计指标情况的效果。</a:t>
             </a:r>
-            <a:endParaRPr lang="zh-CN" altLang="en-US"/>
           </a:p>
         </p:txBody>
       </p:sp>
@@ -1534,6 +1566,7 @@
           <a:p>
             <a:fld id="{9D0D742A-9E91-468C-B0BA-D6E0DC135687}" type="slidenum">
               <a:rPr lang="zh-CN" altLang="en-US" smtClean="0"/>
+              <a:t>18</a:t>
             </a:fld>
             <a:endParaRPr lang="zh-CN" altLang="en-US"/>
           </a:p>
@@ -1628,12 +1661,6 @@
               </a:rPr>
               <a:t>个方面。</a:t>
             </a:r>
-            <a:endParaRPr lang="zh-CN" altLang="zh-CN" sz="1800" kern="100" dirty="0">
-              <a:effectLst/>
-              <a:latin typeface="等线" panose="02010600030101010101" pitchFamily="2" charset="-122"/>
-              <a:ea typeface="等线" panose="02010600030101010101" pitchFamily="2" charset="-122"/>
-              <a:cs typeface="Times New Roman" panose="02020603050405020304" pitchFamily="18" charset="0"/>
-            </a:endParaRPr>
           </a:p>
         </p:txBody>
       </p:sp>
@@ -1654,6 +1681,7 @@
           <a:p>
             <a:fld id="{9D0D742A-9E91-468C-B0BA-D6E0DC135687}" type="slidenum">
               <a:rPr lang="zh-CN" altLang="en-US" smtClean="0"/>
+              <a:t>2</a:t>
             </a:fld>
             <a:endParaRPr lang="zh-CN" altLang="en-US"/>
           </a:p>
@@ -1715,7 +1743,6 @@
               <a:rPr lang="zh-CN" altLang="en-US" dirty="0"/>
               <a:t>首先，项目背景</a:t>
             </a:r>
-            <a:endParaRPr lang="zh-CN" altLang="en-US" dirty="0"/>
           </a:p>
         </p:txBody>
       </p:sp>
@@ -1736,6 +1763,7 @@
           <a:p>
             <a:fld id="{F8D2ECA3-E5F4-44CA-BF21-128C334BA455}" type="slidenum">
               <a:rPr lang="zh-CN" altLang="en-US" smtClean="0"/>
+              <a:t>3</a:t>
             </a:fld>
             <a:endParaRPr lang="zh-CN" altLang="en-US"/>
           </a:p>
@@ -1758,12 +1786,19 @@
         <p:cNvGrpSpPr/>
         <p:nvPr/>
       </p:nvGrpSpPr>
-      <p:grpSpPr/>
+      <p:grpSpPr>
+        <a:xfrm>
+          <a:off x="0" y="0"/>
+          <a:ext cx="0" cy="0"/>
+          <a:chOff x="0" y="0"/>
+          <a:chExt cx="0" cy="0"/>
+        </a:xfrm>
+      </p:grpSpPr>
       <p:sp>
         <p:nvSpPr>
           <p:cNvPr id="2" name="幻灯片图像占位符 1"/>
           <p:cNvSpPr>
-            <a:spLocks noGrp="1"/>
+            <a:spLocks noGrp="1" noRot="1" noChangeAspect="1"/>
           </p:cNvSpPr>
           <p:nvPr>
             <p:ph type="sldImg" idx="2"/>
@@ -1784,6 +1819,7 @@
         <p:spPr/>
         <p:txBody>
           <a:bodyPr/>
+          <a:lstStyle/>
           <a:p>
             <a:r>
               <a:rPr lang="zh-CN" altLang="en-US"/>
@@ -1797,7 +1833,6 @@
               <a:rPr lang="zh-CN" altLang="en-US"/>
               <a:t>网关的性能及稳定性的要求日益增加，微服务类型及服务间通信协议出现多样化的特点。</a:t>
             </a:r>
-            <a:endParaRPr lang="zh-CN" altLang="en-US"/>
           </a:p>
           <a:p>
             <a:r>
@@ -1818,9 +1853,6 @@
               </a:rPr>
               <a:t>需要进行二次开发，造成成本增加的问题。</a:t>
             </a:r>
-            <a:endParaRPr lang="zh-CN" altLang="en-US">
-              <a:sym typeface="+mn-ea"/>
-            </a:endParaRPr>
           </a:p>
           <a:p>
             <a:r>
@@ -1835,7 +1867,6 @@
               <a:rPr lang="zh-CN" altLang="en-US"/>
               <a:t>网关，并采用高性能和监控技术，提升其性能和监控能力。</a:t>
             </a:r>
-            <a:endParaRPr lang="zh-CN" altLang="en-US"/>
           </a:p>
           <a:p>
             <a:r>
@@ -1870,12 +1901,19 @@
         <p:cNvGrpSpPr/>
         <p:nvPr/>
       </p:nvGrpSpPr>
-      <p:grpSpPr/>
+      <p:grpSpPr>
+        <a:xfrm>
+          <a:off x="0" y="0"/>
+          <a:ext cx="0" cy="0"/>
+          <a:chOff x="0" y="0"/>
+          <a:chExt cx="0" cy="0"/>
+        </a:xfrm>
+      </p:grpSpPr>
       <p:sp>
         <p:nvSpPr>
           <p:cNvPr id="2" name="幻灯片图像占位符 1"/>
           <p:cNvSpPr>
-            <a:spLocks noGrp="1"/>
+            <a:spLocks noGrp="1" noRot="1" noChangeAspect="1"/>
           </p:cNvSpPr>
           <p:nvPr>
             <p:ph type="sldImg" idx="2"/>
@@ -1896,6 +1934,7 @@
         <p:spPr/>
         <p:txBody>
           <a:bodyPr/>
+          <a:lstStyle/>
           <a:p>
             <a:r>
               <a:rPr lang="en-US" altLang="zh-CN"/>
@@ -1905,21 +1944,18 @@
               <a:rPr lang="zh-CN" altLang="en-US"/>
               <a:t>网关在微服务架构作为流量入口，主要起着：</a:t>
             </a:r>
-            <a:endParaRPr lang="zh-CN" altLang="en-US"/>
           </a:p>
           <a:p>
             <a:r>
               <a:rPr lang="zh-CN" altLang="en-US"/>
               <a:t>事前的安全防护、事中的路由调用、事后的监控反馈作用。</a:t>
             </a:r>
-            <a:endParaRPr lang="zh-CN" altLang="en-US"/>
           </a:p>
           <a:p>
             <a:r>
               <a:rPr lang="zh-CN" altLang="en-US"/>
               <a:t>而本文的研究重点在于事中、事后的增强。</a:t>
             </a:r>
-            <a:endParaRPr lang="zh-CN" altLang="en-US"/>
           </a:p>
           <a:p>
             <a:endParaRPr lang="zh-CN" altLang="en-US"/>
@@ -1947,7 +1983,6 @@
               <a:rPr lang="zh-CN" altLang="en-US"/>
               <a:t>含开篇</a:t>
             </a:r>
-            <a:endParaRPr lang="zh-CN" altLang="en-US"/>
           </a:p>
         </p:txBody>
       </p:sp>
@@ -2007,7 +2042,6 @@
               <a:rPr lang="zh-CN" altLang="en-US" dirty="0"/>
               <a:t>第二部分，需求分析</a:t>
             </a:r>
-            <a:endParaRPr lang="zh-CN" altLang="en-US" dirty="0"/>
           </a:p>
         </p:txBody>
       </p:sp>
@@ -2028,6 +2062,7 @@
           <a:p>
             <a:fld id="{F8D2ECA3-E5F4-44CA-BF21-128C334BA455}" type="slidenum">
               <a:rPr lang="zh-CN" altLang="en-US" smtClean="0"/>
+              <a:t>6</a:t>
             </a:fld>
             <a:endParaRPr lang="zh-CN" altLang="en-US"/>
           </a:p>
@@ -2050,12 +2085,19 @@
         <p:cNvGrpSpPr/>
         <p:nvPr/>
       </p:nvGrpSpPr>
-      <p:grpSpPr/>
+      <p:grpSpPr>
+        <a:xfrm>
+          <a:off x="0" y="0"/>
+          <a:ext cx="0" cy="0"/>
+          <a:chOff x="0" y="0"/>
+          <a:chExt cx="0" cy="0"/>
+        </a:xfrm>
+      </p:grpSpPr>
       <p:sp>
         <p:nvSpPr>
           <p:cNvPr id="2" name="幻灯片图像占位符 1"/>
           <p:cNvSpPr>
-            <a:spLocks noGrp="1"/>
+            <a:spLocks noGrp="1" noRot="1" noChangeAspect="1"/>
           </p:cNvSpPr>
           <p:nvPr>
             <p:ph type="sldImg" idx="2"/>
@@ -2076,26 +2118,24 @@
         <p:spPr/>
         <p:txBody>
           <a:bodyPr/>
+          <a:lstStyle/>
           <a:p>
             <a:r>
               <a:rPr lang="zh-CN" altLang="en-US"/>
               <a:t>本系统主要包括请求用户、开发人员、运维人员三种角色。</a:t>
             </a:r>
-            <a:endParaRPr lang="zh-CN" altLang="en-US"/>
           </a:p>
           <a:p>
             <a:r>
               <a:rPr lang="zh-CN" altLang="en-US"/>
               <a:t>对于开发人员需要进行插件的定义和业务服务的接入，</a:t>
             </a:r>
-            <a:endParaRPr lang="zh-CN" altLang="en-US"/>
           </a:p>
           <a:p>
             <a:r>
               <a:rPr lang="zh-CN" altLang="en-US"/>
               <a:t>运维人员需要对服务、插件、规则等信息查询或增删改管理，以及能够实现监控网关，接收告警通知。</a:t>
             </a:r>
-            <a:endParaRPr lang="zh-CN" altLang="en-US"/>
           </a:p>
           <a:p>
             <a:r>
@@ -2139,12 +2179,19 @@
         <p:cNvGrpSpPr/>
         <p:nvPr/>
       </p:nvGrpSpPr>
-      <p:grpSpPr/>
+      <p:grpSpPr>
+        <a:xfrm>
+          <a:off x="0" y="0"/>
+          <a:ext cx="0" cy="0"/>
+          <a:chOff x="0" y="0"/>
+          <a:chExt cx="0" cy="0"/>
+        </a:xfrm>
+      </p:grpSpPr>
       <p:sp>
         <p:nvSpPr>
           <p:cNvPr id="2" name="幻灯片图像占位符 1"/>
           <p:cNvSpPr>
-            <a:spLocks noGrp="1"/>
+            <a:spLocks noGrp="1" noRot="1" noChangeAspect="1"/>
           </p:cNvSpPr>
           <p:nvPr>
             <p:ph type="sldImg" idx="2"/>
@@ -2165,12 +2212,12 @@
         <p:spPr/>
         <p:txBody>
           <a:bodyPr/>
+          <a:lstStyle/>
           <a:p>
             <a:r>
               <a:rPr lang="zh-CN" altLang="en-US"/>
               <a:t>本系统的业务基本流程为</a:t>
             </a:r>
-            <a:endParaRPr lang="zh-CN" altLang="en-US"/>
           </a:p>
           <a:p>
             <a:r>
@@ -2259,7 +2306,6 @@
               <a:rPr lang="zh-CN" altLang="en-US" dirty="0"/>
               <a:t>第三部分，系统设计</a:t>
             </a:r>
-            <a:endParaRPr lang="zh-CN" altLang="en-US" dirty="0"/>
           </a:p>
         </p:txBody>
       </p:sp>
@@ -2280,6 +2326,7 @@
           <a:p>
             <a:fld id="{F8D2ECA3-E5F4-44CA-BF21-128C334BA455}" type="slidenum">
               <a:rPr lang="zh-CN" altLang="en-US" smtClean="0"/>
+              <a:t>9</a:t>
             </a:fld>
             <a:endParaRPr lang="zh-CN" altLang="en-US"/>
           </a:p>
@@ -2338,7 +2385,6 @@
               <a:rPr lang="zh-CN" altLang="en-US"/>
               <a:t>单击此处编辑母版标题样式</a:t>
             </a:r>
-            <a:endParaRPr lang="zh-CN" altLang="en-US"/>
           </a:p>
         </p:txBody>
       </p:sp>
@@ -2403,7 +2449,6 @@
               <a:rPr lang="zh-CN" altLang="en-US"/>
               <a:t>单击此处编辑母版副标题样式</a:t>
             </a:r>
-            <a:endParaRPr lang="zh-CN" altLang="en-US"/>
           </a:p>
         </p:txBody>
       </p:sp>
@@ -2424,6 +2469,7 @@
           <a:p>
             <a:fld id="{73568769-642E-4348-AB74-8468C65676C6}" type="datetimeFigureOut">
               <a:rPr lang="zh-CN" altLang="en-US" smtClean="0"/>
+              <a:t>2026/5/14</a:t>
             </a:fld>
             <a:endParaRPr lang="zh-CN" altLang="en-US"/>
           </a:p>
@@ -2465,6 +2511,7 @@
           <a:p>
             <a:fld id="{2139258E-6FC6-4E1F-AC94-5F6B73852711}" type="slidenum">
               <a:rPr lang="zh-CN" altLang="en-US" smtClean="0"/>
+              <a:t>‹#›</a:t>
             </a:fld>
             <a:endParaRPr lang="zh-CN" altLang="en-US"/>
           </a:p>
@@ -2514,7 +2561,6 @@
               <a:rPr lang="zh-CN" altLang="en-US"/>
               <a:t>单击此处编辑母版标题样式</a:t>
             </a:r>
-            <a:endParaRPr lang="zh-CN" altLang="en-US"/>
           </a:p>
         </p:txBody>
       </p:sp>
@@ -2538,7 +2584,6 @@
               <a:rPr lang="zh-CN" altLang="en-US"/>
               <a:t>单击此处编辑母版文本样式</a:t>
             </a:r>
-            <a:endParaRPr lang="zh-CN" altLang="en-US"/>
           </a:p>
           <a:p>
             <a:pPr lvl="1"/>
@@ -2546,7 +2591,6 @@
               <a:rPr lang="zh-CN" altLang="en-US"/>
               <a:t>二级</a:t>
             </a:r>
-            <a:endParaRPr lang="zh-CN" altLang="en-US"/>
           </a:p>
           <a:p>
             <a:pPr lvl="2"/>
@@ -2554,7 +2598,6 @@
               <a:rPr lang="zh-CN" altLang="en-US"/>
               <a:t>三级</a:t>
             </a:r>
-            <a:endParaRPr lang="zh-CN" altLang="en-US"/>
           </a:p>
           <a:p>
             <a:pPr lvl="3"/>
@@ -2562,7 +2605,6 @@
               <a:rPr lang="zh-CN" altLang="en-US"/>
               <a:t>四级</a:t>
             </a:r>
-            <a:endParaRPr lang="zh-CN" altLang="en-US"/>
           </a:p>
           <a:p>
             <a:pPr lvl="4"/>
@@ -2570,7 +2612,6 @@
               <a:rPr lang="zh-CN" altLang="en-US"/>
               <a:t>五级</a:t>
             </a:r>
-            <a:endParaRPr lang="zh-CN" altLang="en-US"/>
           </a:p>
         </p:txBody>
       </p:sp>
@@ -2591,6 +2632,7 @@
           <a:p>
             <a:fld id="{73568769-642E-4348-AB74-8468C65676C6}" type="datetimeFigureOut">
               <a:rPr lang="zh-CN" altLang="en-US" smtClean="0"/>
+              <a:t>2026/5/14</a:t>
             </a:fld>
             <a:endParaRPr lang="zh-CN" altLang="en-US"/>
           </a:p>
@@ -2632,6 +2674,7 @@
           <a:p>
             <a:fld id="{2139258E-6FC6-4E1F-AC94-5F6B73852711}" type="slidenum">
               <a:rPr lang="zh-CN" altLang="en-US" smtClean="0"/>
+              <a:t>‹#›</a:t>
             </a:fld>
             <a:endParaRPr lang="zh-CN" altLang="en-US"/>
           </a:p>
@@ -2686,7 +2729,6 @@
               <a:rPr lang="zh-CN" altLang="en-US"/>
               <a:t>单击此处编辑母版标题样式</a:t>
             </a:r>
-            <a:endParaRPr lang="zh-CN" altLang="en-US"/>
           </a:p>
         </p:txBody>
       </p:sp>
@@ -2715,7 +2757,6 @@
               <a:rPr lang="zh-CN" altLang="en-US"/>
               <a:t>单击此处编辑母版文本样式</a:t>
             </a:r>
-            <a:endParaRPr lang="zh-CN" altLang="en-US"/>
           </a:p>
           <a:p>
             <a:pPr lvl="1"/>
@@ -2723,7 +2764,6 @@
               <a:rPr lang="zh-CN" altLang="en-US"/>
               <a:t>二级</a:t>
             </a:r>
-            <a:endParaRPr lang="zh-CN" altLang="en-US"/>
           </a:p>
           <a:p>
             <a:pPr lvl="2"/>
@@ -2731,7 +2771,6 @@
               <a:rPr lang="zh-CN" altLang="en-US"/>
               <a:t>三级</a:t>
             </a:r>
-            <a:endParaRPr lang="zh-CN" altLang="en-US"/>
           </a:p>
           <a:p>
             <a:pPr lvl="3"/>
@@ -2739,7 +2778,6 @@
               <a:rPr lang="zh-CN" altLang="en-US"/>
               <a:t>四级</a:t>
             </a:r>
-            <a:endParaRPr lang="zh-CN" altLang="en-US"/>
           </a:p>
           <a:p>
             <a:pPr lvl="4"/>
@@ -2747,7 +2785,6 @@
               <a:rPr lang="zh-CN" altLang="en-US"/>
               <a:t>五级</a:t>
             </a:r>
-            <a:endParaRPr lang="zh-CN" altLang="en-US"/>
           </a:p>
         </p:txBody>
       </p:sp>
@@ -2768,6 +2805,7 @@
           <a:p>
             <a:fld id="{73568769-642E-4348-AB74-8468C65676C6}" type="datetimeFigureOut">
               <a:rPr lang="zh-CN" altLang="en-US" smtClean="0"/>
+              <a:t>2026/5/14</a:t>
             </a:fld>
             <a:endParaRPr lang="zh-CN" altLang="en-US"/>
           </a:p>
@@ -2809,6 +2847,7 @@
           <a:p>
             <a:fld id="{2139258E-6FC6-4E1F-AC94-5F6B73852711}" type="slidenum">
               <a:rPr lang="zh-CN" altLang="en-US" smtClean="0"/>
+              <a:t>‹#›</a:t>
             </a:fld>
             <a:endParaRPr lang="zh-CN" altLang="en-US"/>
           </a:p>
@@ -2848,7 +2887,7 @@
           <p:nvPr>
             <p:ph type="title"/>
             <p:custDataLst>
-              <p:tags r:id="rId2"/>
+              <p:tags r:id="rId1"/>
             </p:custDataLst>
           </p:nvPr>
         </p:nvSpPr>
@@ -2869,7 +2908,6 @@
               <a:rPr lang="zh-CN" altLang="en-US"/>
               <a:t>单击此处编辑母版标题样式</a:t>
             </a:r>
-            <a:endParaRPr lang="zh-CN" altLang="en-US"/>
           </a:p>
         </p:txBody>
       </p:sp>
@@ -2882,7 +2920,7 @@
           <p:nvPr>
             <p:ph type="body" idx="1" hasCustomPrompt="1"/>
             <p:custDataLst>
-              <p:tags r:id="rId3"/>
+              <p:tags r:id="rId2"/>
             </p:custDataLst>
           </p:nvPr>
         </p:nvSpPr>
@@ -2963,7 +3001,7 @@
           <p:nvPr>
             <p:ph type="dt" sz="half" idx="10"/>
             <p:custDataLst>
-              <p:tags r:id="rId4"/>
+              <p:tags r:id="rId3"/>
             </p:custDataLst>
           </p:nvPr>
         </p:nvSpPr>
@@ -2974,6 +3012,7 @@
           <a:p>
             <a:fld id="{760FBDFE-C587-4B4C-A407-44438C67B59E}" type="datetimeFigureOut">
               <a:rPr lang="zh-CN" altLang="en-US" smtClean="0"/>
+              <a:t>2026/5/14</a:t>
             </a:fld>
             <a:endParaRPr lang="zh-CN" altLang="en-US"/>
           </a:p>
@@ -2988,7 +3027,7 @@
           <p:nvPr>
             <p:ph type="ftr" sz="quarter" idx="11"/>
             <p:custDataLst>
-              <p:tags r:id="rId5"/>
+              <p:tags r:id="rId4"/>
             </p:custDataLst>
           </p:nvPr>
         </p:nvSpPr>
@@ -3010,7 +3049,7 @@
           <p:nvPr>
             <p:ph type="sldNum" sz="quarter" idx="12"/>
             <p:custDataLst>
-              <p:tags r:id="rId6"/>
+              <p:tags r:id="rId5"/>
             </p:custDataLst>
           </p:nvPr>
         </p:nvSpPr>
@@ -3021,6 +3060,7 @@
           <a:p>
             <a:fld id="{49AE70B2-8BF9-45C0-BB95-33D1B9D3A854}" type="slidenum">
               <a:rPr lang="zh-CN" altLang="en-US" smtClean="0"/>
+              <a:t>‹#›</a:t>
             </a:fld>
             <a:endParaRPr lang="zh-CN" altLang="en-US"/>
           </a:p>
@@ -3070,7 +3110,6 @@
               <a:rPr lang="zh-CN" altLang="en-US"/>
               <a:t>单击此处编辑母版标题样式</a:t>
             </a:r>
-            <a:endParaRPr lang="zh-CN" altLang="en-US"/>
           </a:p>
         </p:txBody>
       </p:sp>
@@ -3094,7 +3133,6 @@
               <a:rPr lang="zh-CN" altLang="en-US"/>
               <a:t>单击此处编辑母版文本样式</a:t>
             </a:r>
-            <a:endParaRPr lang="zh-CN" altLang="en-US"/>
           </a:p>
           <a:p>
             <a:pPr lvl="1"/>
@@ -3102,7 +3140,6 @@
               <a:rPr lang="zh-CN" altLang="en-US"/>
               <a:t>二级</a:t>
             </a:r>
-            <a:endParaRPr lang="zh-CN" altLang="en-US"/>
           </a:p>
           <a:p>
             <a:pPr lvl="2"/>
@@ -3110,7 +3147,6 @@
               <a:rPr lang="zh-CN" altLang="en-US"/>
               <a:t>三级</a:t>
             </a:r>
-            <a:endParaRPr lang="zh-CN" altLang="en-US"/>
           </a:p>
           <a:p>
             <a:pPr lvl="3"/>
@@ -3118,7 +3154,6 @@
               <a:rPr lang="zh-CN" altLang="en-US"/>
               <a:t>四级</a:t>
             </a:r>
-            <a:endParaRPr lang="zh-CN" altLang="en-US"/>
           </a:p>
           <a:p>
             <a:pPr lvl="4"/>
@@ -3126,7 +3161,6 @@
               <a:rPr lang="zh-CN" altLang="en-US"/>
               <a:t>五级</a:t>
             </a:r>
-            <a:endParaRPr lang="zh-CN" altLang="en-US"/>
           </a:p>
         </p:txBody>
       </p:sp>
@@ -3147,6 +3181,7 @@
           <a:p>
             <a:fld id="{73568769-642E-4348-AB74-8468C65676C6}" type="datetimeFigureOut">
               <a:rPr lang="zh-CN" altLang="en-US" smtClean="0"/>
+              <a:t>2026/5/14</a:t>
             </a:fld>
             <a:endParaRPr lang="zh-CN" altLang="en-US"/>
           </a:p>
@@ -3188,6 +3223,7 @@
           <a:p>
             <a:fld id="{2139258E-6FC6-4E1F-AC94-5F6B73852711}" type="slidenum">
               <a:rPr lang="zh-CN" altLang="en-US" smtClean="0"/>
+              <a:t>‹#›</a:t>
             </a:fld>
             <a:endParaRPr lang="zh-CN" altLang="en-US"/>
           </a:p>
@@ -3246,7 +3282,6 @@
               <a:rPr lang="zh-CN" altLang="en-US"/>
               <a:t>单击此处编辑母版标题样式</a:t>
             </a:r>
-            <a:endParaRPr lang="zh-CN" altLang="en-US"/>
           </a:p>
         </p:txBody>
       </p:sp>
@@ -3366,7 +3401,6 @@
               <a:rPr lang="zh-CN" altLang="en-US"/>
               <a:t>单击此处编辑母版文本样式</a:t>
             </a:r>
-            <a:endParaRPr lang="zh-CN" altLang="en-US"/>
           </a:p>
         </p:txBody>
       </p:sp>
@@ -3387,6 +3421,7 @@
           <a:p>
             <a:fld id="{73568769-642E-4348-AB74-8468C65676C6}" type="datetimeFigureOut">
               <a:rPr lang="zh-CN" altLang="en-US" smtClean="0"/>
+              <a:t>2026/5/14</a:t>
             </a:fld>
             <a:endParaRPr lang="zh-CN" altLang="en-US"/>
           </a:p>
@@ -3428,6 +3463,7 @@
           <a:p>
             <a:fld id="{2139258E-6FC6-4E1F-AC94-5F6B73852711}" type="slidenum">
               <a:rPr lang="zh-CN" altLang="en-US" smtClean="0"/>
+              <a:t>‹#›</a:t>
             </a:fld>
             <a:endParaRPr lang="zh-CN" altLang="en-US"/>
           </a:p>
@@ -3477,7 +3513,6 @@
               <a:rPr lang="zh-CN" altLang="en-US"/>
               <a:t>单击此处编辑母版标题样式</a:t>
             </a:r>
-            <a:endParaRPr lang="zh-CN" altLang="en-US"/>
           </a:p>
         </p:txBody>
       </p:sp>
@@ -3506,7 +3541,6 @@
               <a:rPr lang="zh-CN" altLang="en-US"/>
               <a:t>单击此处编辑母版文本样式</a:t>
             </a:r>
-            <a:endParaRPr lang="zh-CN" altLang="en-US"/>
           </a:p>
           <a:p>
             <a:pPr lvl="1"/>
@@ -3514,7 +3548,6 @@
               <a:rPr lang="zh-CN" altLang="en-US"/>
               <a:t>二级</a:t>
             </a:r>
-            <a:endParaRPr lang="zh-CN" altLang="en-US"/>
           </a:p>
           <a:p>
             <a:pPr lvl="2"/>
@@ -3522,7 +3555,6 @@
               <a:rPr lang="zh-CN" altLang="en-US"/>
               <a:t>三级</a:t>
             </a:r>
-            <a:endParaRPr lang="zh-CN" altLang="en-US"/>
           </a:p>
           <a:p>
             <a:pPr lvl="3"/>
@@ -3530,7 +3562,6 @@
               <a:rPr lang="zh-CN" altLang="en-US"/>
               <a:t>四级</a:t>
             </a:r>
-            <a:endParaRPr lang="zh-CN" altLang="en-US"/>
           </a:p>
           <a:p>
             <a:pPr lvl="4"/>
@@ -3538,7 +3569,6 @@
               <a:rPr lang="zh-CN" altLang="en-US"/>
               <a:t>五级</a:t>
             </a:r>
-            <a:endParaRPr lang="zh-CN" altLang="en-US"/>
           </a:p>
         </p:txBody>
       </p:sp>
@@ -3567,7 +3597,6 @@
               <a:rPr lang="zh-CN" altLang="en-US"/>
               <a:t>单击此处编辑母版文本样式</a:t>
             </a:r>
-            <a:endParaRPr lang="zh-CN" altLang="en-US"/>
           </a:p>
           <a:p>
             <a:pPr lvl="1"/>
@@ -3575,7 +3604,6 @@
               <a:rPr lang="zh-CN" altLang="en-US"/>
               <a:t>二级</a:t>
             </a:r>
-            <a:endParaRPr lang="zh-CN" altLang="en-US"/>
           </a:p>
           <a:p>
             <a:pPr lvl="2"/>
@@ -3583,7 +3611,6 @@
               <a:rPr lang="zh-CN" altLang="en-US"/>
               <a:t>三级</a:t>
             </a:r>
-            <a:endParaRPr lang="zh-CN" altLang="en-US"/>
           </a:p>
           <a:p>
             <a:pPr lvl="3"/>
@@ -3591,7 +3618,6 @@
               <a:rPr lang="zh-CN" altLang="en-US"/>
               <a:t>四级</a:t>
             </a:r>
-            <a:endParaRPr lang="zh-CN" altLang="en-US"/>
           </a:p>
           <a:p>
             <a:pPr lvl="4"/>
@@ -3599,7 +3625,6 @@
               <a:rPr lang="zh-CN" altLang="en-US"/>
               <a:t>五级</a:t>
             </a:r>
-            <a:endParaRPr lang="zh-CN" altLang="en-US"/>
           </a:p>
         </p:txBody>
       </p:sp>
@@ -3620,6 +3645,7 @@
           <a:p>
             <a:fld id="{73568769-642E-4348-AB74-8468C65676C6}" type="datetimeFigureOut">
               <a:rPr lang="zh-CN" altLang="en-US" smtClean="0"/>
+              <a:t>2026/5/14</a:t>
             </a:fld>
             <a:endParaRPr lang="zh-CN" altLang="en-US"/>
           </a:p>
@@ -3661,6 +3687,7 @@
           <a:p>
             <a:fld id="{2139258E-6FC6-4E1F-AC94-5F6B73852711}" type="slidenum">
               <a:rPr lang="zh-CN" altLang="en-US" smtClean="0"/>
+              <a:t>‹#›</a:t>
             </a:fld>
             <a:endParaRPr lang="zh-CN" altLang="en-US"/>
           </a:p>
@@ -3715,7 +3742,6 @@
               <a:rPr lang="zh-CN" altLang="en-US"/>
               <a:t>单击此处编辑母版标题样式</a:t>
             </a:r>
-            <a:endParaRPr lang="zh-CN" altLang="en-US"/>
           </a:p>
         </p:txBody>
       </p:sp>
@@ -3781,7 +3807,6 @@
               <a:rPr lang="zh-CN" altLang="en-US"/>
               <a:t>单击此处编辑母版文本样式</a:t>
             </a:r>
-            <a:endParaRPr lang="zh-CN" altLang="en-US"/>
           </a:p>
         </p:txBody>
       </p:sp>
@@ -3810,7 +3835,6 @@
               <a:rPr lang="zh-CN" altLang="en-US"/>
               <a:t>单击此处编辑母版文本样式</a:t>
             </a:r>
-            <a:endParaRPr lang="zh-CN" altLang="en-US"/>
           </a:p>
           <a:p>
             <a:pPr lvl="1"/>
@@ -3818,7 +3842,6 @@
               <a:rPr lang="zh-CN" altLang="en-US"/>
               <a:t>二级</a:t>
             </a:r>
-            <a:endParaRPr lang="zh-CN" altLang="en-US"/>
           </a:p>
           <a:p>
             <a:pPr lvl="2"/>
@@ -3826,7 +3849,6 @@
               <a:rPr lang="zh-CN" altLang="en-US"/>
               <a:t>三级</a:t>
             </a:r>
-            <a:endParaRPr lang="zh-CN" altLang="en-US"/>
           </a:p>
           <a:p>
             <a:pPr lvl="3"/>
@@ -3834,7 +3856,6 @@
               <a:rPr lang="zh-CN" altLang="en-US"/>
               <a:t>四级</a:t>
             </a:r>
-            <a:endParaRPr lang="zh-CN" altLang="en-US"/>
           </a:p>
           <a:p>
             <a:pPr lvl="4"/>
@@ -3842,7 +3863,6 @@
               <a:rPr lang="zh-CN" altLang="en-US"/>
               <a:t>五级</a:t>
             </a:r>
-            <a:endParaRPr lang="zh-CN" altLang="en-US"/>
           </a:p>
         </p:txBody>
       </p:sp>
@@ -3908,7 +3928,6 @@
               <a:rPr lang="zh-CN" altLang="en-US"/>
               <a:t>单击此处编辑母版文本样式</a:t>
             </a:r>
-            <a:endParaRPr lang="zh-CN" altLang="en-US"/>
           </a:p>
         </p:txBody>
       </p:sp>
@@ -3937,7 +3956,6 @@
               <a:rPr lang="zh-CN" altLang="en-US"/>
               <a:t>单击此处编辑母版文本样式</a:t>
             </a:r>
-            <a:endParaRPr lang="zh-CN" altLang="en-US"/>
           </a:p>
           <a:p>
             <a:pPr lvl="1"/>
@@ -3945,7 +3963,6 @@
               <a:rPr lang="zh-CN" altLang="en-US"/>
               <a:t>二级</a:t>
             </a:r>
-            <a:endParaRPr lang="zh-CN" altLang="en-US"/>
           </a:p>
           <a:p>
             <a:pPr lvl="2"/>
@@ -3953,7 +3970,6 @@
               <a:rPr lang="zh-CN" altLang="en-US"/>
               <a:t>三级</a:t>
             </a:r>
-            <a:endParaRPr lang="zh-CN" altLang="en-US"/>
           </a:p>
           <a:p>
             <a:pPr lvl="3"/>
@@ -3961,7 +3977,6 @@
               <a:rPr lang="zh-CN" altLang="en-US"/>
               <a:t>四级</a:t>
             </a:r>
-            <a:endParaRPr lang="zh-CN" altLang="en-US"/>
           </a:p>
           <a:p>
             <a:pPr lvl="4"/>
@@ -3969,7 +3984,6 @@
               <a:rPr lang="zh-CN" altLang="en-US"/>
               <a:t>五级</a:t>
             </a:r>
-            <a:endParaRPr lang="zh-CN" altLang="en-US"/>
           </a:p>
         </p:txBody>
       </p:sp>
@@ -3990,6 +4004,7 @@
           <a:p>
             <a:fld id="{73568769-642E-4348-AB74-8468C65676C6}" type="datetimeFigureOut">
               <a:rPr lang="zh-CN" altLang="en-US" smtClean="0"/>
+              <a:t>2026/5/14</a:t>
             </a:fld>
             <a:endParaRPr lang="zh-CN" altLang="en-US"/>
           </a:p>
@@ -4031,6 +4046,7 @@
           <a:p>
             <a:fld id="{2139258E-6FC6-4E1F-AC94-5F6B73852711}" type="slidenum">
               <a:rPr lang="zh-CN" altLang="en-US" smtClean="0"/>
+              <a:t>‹#›</a:t>
             </a:fld>
             <a:endParaRPr lang="zh-CN" altLang="en-US"/>
           </a:p>
@@ -4080,7 +4096,6 @@
               <a:rPr lang="zh-CN" altLang="en-US"/>
               <a:t>单击此处编辑母版标题样式</a:t>
             </a:r>
-            <a:endParaRPr lang="zh-CN" altLang="en-US"/>
           </a:p>
         </p:txBody>
       </p:sp>
@@ -4101,6 +4116,7 @@
           <a:p>
             <a:fld id="{73568769-642E-4348-AB74-8468C65676C6}" type="datetimeFigureOut">
               <a:rPr lang="zh-CN" altLang="en-US" smtClean="0"/>
+              <a:t>2026/5/14</a:t>
             </a:fld>
             <a:endParaRPr lang="zh-CN" altLang="en-US"/>
           </a:p>
@@ -4142,6 +4158,7 @@
           <a:p>
             <a:fld id="{2139258E-6FC6-4E1F-AC94-5F6B73852711}" type="slidenum">
               <a:rPr lang="zh-CN" altLang="en-US" smtClean="0"/>
+              <a:t>‹#›</a:t>
             </a:fld>
             <a:endParaRPr lang="zh-CN" altLang="en-US"/>
           </a:p>
@@ -4189,6 +4206,7 @@
           <a:p>
             <a:fld id="{73568769-642E-4348-AB74-8468C65676C6}" type="datetimeFigureOut">
               <a:rPr lang="zh-CN" altLang="en-US" smtClean="0"/>
+              <a:t>2026/5/14</a:t>
             </a:fld>
             <a:endParaRPr lang="zh-CN" altLang="en-US"/>
           </a:p>
@@ -4230,6 +4248,7 @@
           <a:p>
             <a:fld id="{2139258E-6FC6-4E1F-AC94-5F6B73852711}" type="slidenum">
               <a:rPr lang="zh-CN" altLang="en-US" smtClean="0"/>
+              <a:t>‹#›</a:t>
             </a:fld>
             <a:endParaRPr lang="zh-CN" altLang="en-US"/>
           </a:p>
@@ -4288,7 +4307,6 @@
               <a:rPr lang="zh-CN" altLang="en-US"/>
               <a:t>单击此处编辑母版标题样式</a:t>
             </a:r>
-            <a:endParaRPr lang="zh-CN" altLang="en-US"/>
           </a:p>
         </p:txBody>
       </p:sp>
@@ -4345,7 +4363,6 @@
               <a:rPr lang="zh-CN" altLang="en-US"/>
               <a:t>单击此处编辑母版文本样式</a:t>
             </a:r>
-            <a:endParaRPr lang="zh-CN" altLang="en-US"/>
           </a:p>
           <a:p>
             <a:pPr lvl="1"/>
@@ -4353,7 +4370,6 @@
               <a:rPr lang="zh-CN" altLang="en-US"/>
               <a:t>二级</a:t>
             </a:r>
-            <a:endParaRPr lang="zh-CN" altLang="en-US"/>
           </a:p>
           <a:p>
             <a:pPr lvl="2"/>
@@ -4361,7 +4377,6 @@
               <a:rPr lang="zh-CN" altLang="en-US"/>
               <a:t>三级</a:t>
             </a:r>
-            <a:endParaRPr lang="zh-CN" altLang="en-US"/>
           </a:p>
           <a:p>
             <a:pPr lvl="3"/>
@@ -4369,7 +4384,6 @@
               <a:rPr lang="zh-CN" altLang="en-US"/>
               <a:t>四级</a:t>
             </a:r>
-            <a:endParaRPr lang="zh-CN" altLang="en-US"/>
           </a:p>
           <a:p>
             <a:pPr lvl="4"/>
@@ -4377,7 +4391,6 @@
               <a:rPr lang="zh-CN" altLang="en-US"/>
               <a:t>五级</a:t>
             </a:r>
-            <a:endParaRPr lang="zh-CN" altLang="en-US"/>
           </a:p>
         </p:txBody>
       </p:sp>
@@ -4443,7 +4456,6 @@
               <a:rPr lang="zh-CN" altLang="en-US"/>
               <a:t>单击此处编辑母版文本样式</a:t>
             </a:r>
-            <a:endParaRPr lang="zh-CN" altLang="en-US"/>
           </a:p>
         </p:txBody>
       </p:sp>
@@ -4464,6 +4476,7 @@
           <a:p>
             <a:fld id="{73568769-642E-4348-AB74-8468C65676C6}" type="datetimeFigureOut">
               <a:rPr lang="zh-CN" altLang="en-US" smtClean="0"/>
+              <a:t>2026/5/14</a:t>
             </a:fld>
             <a:endParaRPr lang="zh-CN" altLang="en-US"/>
           </a:p>
@@ -4505,6 +4518,7 @@
           <a:p>
             <a:fld id="{2139258E-6FC6-4E1F-AC94-5F6B73852711}" type="slidenum">
               <a:rPr lang="zh-CN" altLang="en-US" smtClean="0"/>
+              <a:t>‹#›</a:t>
             </a:fld>
             <a:endParaRPr lang="zh-CN" altLang="en-US"/>
           </a:p>
@@ -4563,7 +4577,6 @@
               <a:rPr lang="zh-CN" altLang="en-US"/>
               <a:t>单击此处编辑母版标题样式</a:t>
             </a:r>
-            <a:endParaRPr lang="zh-CN" altLang="en-US"/>
           </a:p>
         </p:txBody>
       </p:sp>
@@ -4690,7 +4703,6 @@
               <a:rPr lang="zh-CN" altLang="en-US"/>
               <a:t>单击此处编辑母版文本样式</a:t>
             </a:r>
-            <a:endParaRPr lang="zh-CN" altLang="en-US"/>
           </a:p>
         </p:txBody>
       </p:sp>
@@ -4711,6 +4723,7 @@
           <a:p>
             <a:fld id="{73568769-642E-4348-AB74-8468C65676C6}" type="datetimeFigureOut">
               <a:rPr lang="zh-CN" altLang="en-US" smtClean="0"/>
+              <a:t>2026/5/14</a:t>
             </a:fld>
             <a:endParaRPr lang="zh-CN" altLang="en-US"/>
           </a:p>
@@ -4752,6 +4765,7 @@
           <a:p>
             <a:fld id="{2139258E-6FC6-4E1F-AC94-5F6B73852711}" type="slidenum">
               <a:rPr lang="zh-CN" altLang="en-US" smtClean="0"/>
+              <a:t>‹#›</a:t>
             </a:fld>
             <a:endParaRPr lang="zh-CN" altLang="en-US"/>
           </a:p>
@@ -4816,7 +4830,6 @@
               <a:rPr lang="zh-CN" altLang="en-US"/>
               <a:t>单击此处编辑母版标题样式</a:t>
             </a:r>
-            <a:endParaRPr lang="zh-CN" altLang="en-US"/>
           </a:p>
         </p:txBody>
       </p:sp>
@@ -4850,7 +4863,6 @@
               <a:rPr lang="zh-CN" altLang="en-US"/>
               <a:t>单击此处编辑母版文本样式</a:t>
             </a:r>
-            <a:endParaRPr lang="zh-CN" altLang="en-US"/>
           </a:p>
           <a:p>
             <a:pPr lvl="1"/>
@@ -4858,7 +4870,6 @@
               <a:rPr lang="zh-CN" altLang="en-US"/>
               <a:t>二级</a:t>
             </a:r>
-            <a:endParaRPr lang="zh-CN" altLang="en-US"/>
           </a:p>
           <a:p>
             <a:pPr lvl="2"/>
@@ -4866,7 +4877,6 @@
               <a:rPr lang="zh-CN" altLang="en-US"/>
               <a:t>三级</a:t>
             </a:r>
-            <a:endParaRPr lang="zh-CN" altLang="en-US"/>
           </a:p>
           <a:p>
             <a:pPr lvl="3"/>
@@ -4874,7 +4884,6 @@
               <a:rPr lang="zh-CN" altLang="en-US"/>
               <a:t>四级</a:t>
             </a:r>
-            <a:endParaRPr lang="zh-CN" altLang="en-US"/>
           </a:p>
           <a:p>
             <a:pPr lvl="4"/>
@@ -4882,7 +4891,6 @@
               <a:rPr lang="zh-CN" altLang="en-US"/>
               <a:t>五级</a:t>
             </a:r>
-            <a:endParaRPr lang="zh-CN" altLang="en-US"/>
           </a:p>
         </p:txBody>
       </p:sp>
@@ -4921,6 +4929,7 @@
           <a:p>
             <a:fld id="{73568769-642E-4348-AB74-8468C65676C6}" type="datetimeFigureOut">
               <a:rPr lang="zh-CN" altLang="en-US" smtClean="0"/>
+              <a:t>2026/5/14</a:t>
             </a:fld>
             <a:endParaRPr lang="zh-CN" altLang="en-US"/>
           </a:p>
@@ -4998,6 +5007,7 @@
           <a:p>
             <a:fld id="{2139258E-6FC6-4E1F-AC94-5F6B73852711}" type="slidenum">
               <a:rPr lang="zh-CN" altLang="en-US" smtClean="0"/>
+              <a:t>‹#›</a:t>
             </a:fld>
             <a:endParaRPr lang="zh-CN" altLang="en-US"/>
           </a:p>
@@ -5418,13 +5428,6 @@
               </a:rPr>
               <a:t>网关及监控系统的设计与实现</a:t>
             </a:r>
-            <a:endParaRPr lang="zh-CN" altLang="en-US" sz="4400" b="1" dirty="0">
-              <a:solidFill>
-                <a:schemeClr val="bg1"/>
-              </a:solidFill>
-              <a:latin typeface="黑体" panose="02010609060101010101" pitchFamily="49" charset="-122"/>
-              <a:ea typeface="黑体" panose="02010609060101010101" pitchFamily="49" charset="-122"/>
-            </a:endParaRPr>
           </a:p>
         </p:txBody>
       </p:sp>
@@ -5557,7 +5560,7 @@
           <p:nvPr/>
         </p:nvPicPr>
         <p:blipFill>
-          <a:blip r:embed="rId1">
+          <a:blip r:embed="rId3">
             <a:extLst>
               <a:ext uri="{28A0092B-C50C-407E-A947-70E740481C1C}">
                 <a14:useLocalDpi xmlns:a14="http://schemas.microsoft.com/office/drawing/2010/main" val="0"/>
@@ -5587,7 +5590,7 @@
           <p:nvPr/>
         </p:nvPicPr>
         <p:blipFill>
-          <a:blip r:embed="rId2">
+          <a:blip r:embed="rId4">
             <a:extLst>
               <a:ext uri="{28A0092B-C50C-407E-A947-70E740481C1C}">
                 <a14:useLocalDpi xmlns:a14="http://schemas.microsoft.com/office/drawing/2010/main" val="0"/>
@@ -5638,11 +5641,6 @@
               </a:rPr>
               <a:t>硕士毕业论文答辩</a:t>
             </a:r>
-            <a:endParaRPr lang="zh-CN" altLang="en-US" sz="3200" b="1" dirty="0">
-              <a:solidFill>
-                <a:srgbClr val="6B0060"/>
-              </a:solidFill>
-            </a:endParaRPr>
           </a:p>
         </p:txBody>
       </p:sp>
@@ -5924,13 +5922,6 @@
               </a:rPr>
               <a:t>系统设计</a:t>
             </a:r>
-            <a:endParaRPr lang="zh-CN" altLang="en-US" sz="3600" b="1" dirty="0">
-              <a:solidFill>
-                <a:schemeClr val="bg1"/>
-              </a:solidFill>
-              <a:latin typeface="等线" panose="02010600030101010101" pitchFamily="2" charset="-122"/>
-              <a:sym typeface="等线" panose="02010600030101010101" pitchFamily="2" charset="-122"/>
-            </a:endParaRPr>
           </a:p>
         </p:txBody>
       </p:sp>
@@ -5943,7 +5934,7 @@
           <p:nvPr/>
         </p:nvPicPr>
         <p:blipFill>
-          <a:blip r:embed="rId1" cstate="print">
+          <a:blip r:embed="rId3" cstate="print">
             <a:extLst>
               <a:ext uri="{28A0092B-C50C-407E-A947-70E740481C1C}">
                 <a14:useLocalDpi xmlns:a14="http://schemas.microsoft.com/office/drawing/2010/main" val="0"/>
@@ -6012,10 +6003,6 @@
               </a:rPr>
               <a:t>架构层次设计</a:t>
             </a:r>
-            <a:endParaRPr lang="zh-CN" altLang="en-US" b="1" dirty="0">
-              <a:latin typeface="Microsoft YaHei UI" panose="020B0503020204020204" pitchFamily="34" charset="-122"/>
-              <a:ea typeface="Microsoft YaHei UI" panose="020B0503020204020204" pitchFamily="34" charset="-122"/>
-            </a:endParaRPr>
           </a:p>
         </p:txBody>
       </p:sp>
@@ -6039,6 +6026,7 @@
           <a:bodyPr wrap="square" rtlCol="0">
             <a:noAutofit/>
           </a:bodyPr>
+          <a:lstStyle/>
           <a:p>
             <a:r>
               <a:rPr lang="zh-CN" altLang="en-US" sz="2000" b="1"/>
@@ -6052,7 +6040,6 @@
               <a:rPr lang="zh-CN" altLang="en-US" sz="2000" b="1"/>
               <a:t>）：</a:t>
             </a:r>
-            <a:endParaRPr lang="zh-CN" altLang="en-US" sz="2000" b="1"/>
           </a:p>
           <a:p>
             <a:r>
@@ -6079,7 +6066,6 @@
               <a:rPr lang="zh-CN" altLang="en-US"/>
               <a:t>实现）</a:t>
             </a:r>
-            <a:endParaRPr lang="zh-CN" altLang="en-US"/>
           </a:p>
           <a:p>
             <a:r>
@@ -6098,7 +6084,6 @@
               <a:rPr lang="zh-CN" altLang="en-US"/>
               <a:t>、通知应用等三方工具</a:t>
             </a:r>
-            <a:endParaRPr lang="zh-CN" altLang="en-US"/>
           </a:p>
           <a:p>
             <a:endParaRPr lang="en-US" altLang="zh-CN"/>
@@ -6119,7 +6104,6 @@
               <a:rPr lang="zh-CN" altLang="en-US" sz="2000" b="1"/>
               <a:t>）：</a:t>
             </a:r>
-            <a:endParaRPr lang="zh-CN" altLang="en-US" sz="2000" b="1"/>
           </a:p>
           <a:p>
             <a:r>
@@ -6158,9 +6142,6 @@
               </a:rPr>
               <a:t>包）</a:t>
             </a:r>
-            <a:endParaRPr lang="zh-CN" altLang="en-US">
-              <a:sym typeface="+mn-ea"/>
-            </a:endParaRPr>
           </a:p>
           <a:p>
             <a:r>
@@ -6199,9 +6180,6 @@
               </a:rPr>
               <a:t>程序）</a:t>
             </a:r>
-            <a:endParaRPr lang="zh-CN" altLang="en-US">
-              <a:sym typeface="+mn-ea"/>
-            </a:endParaRPr>
           </a:p>
           <a:p>
             <a:r>
@@ -6228,9 +6206,6 @@
               </a:rPr>
               <a:t>框架的服务）</a:t>
             </a:r>
-            <a:endParaRPr lang="zh-CN" altLang="en-US">
-              <a:sym typeface="+mn-ea"/>
-            </a:endParaRPr>
           </a:p>
           <a:p>
             <a:r>
@@ -6257,9 +6232,6 @@
               </a:rPr>
               <a:t>）</a:t>
             </a:r>
-            <a:endParaRPr lang="zh-CN" altLang="en-US">
-              <a:sym typeface="+mn-ea"/>
-            </a:endParaRPr>
           </a:p>
           <a:p>
             <a:r>
@@ -6348,9 +6320,6 @@
               </a:rPr>
               <a:t>，用于服务与实例节点信息的存储</a:t>
             </a:r>
-            <a:endParaRPr lang="zh-CN" altLang="en-US">
-              <a:sym typeface="+mn-ea"/>
-            </a:endParaRPr>
           </a:p>
           <a:p>
             <a:r>
@@ -6365,9 +6334,6 @@
               </a:rPr>
               <a:t>，用于监控指标与日志的存储</a:t>
             </a:r>
-            <a:endParaRPr lang="zh-CN" altLang="en-US">
-              <a:sym typeface="+mn-ea"/>
-            </a:endParaRPr>
           </a:p>
           <a:p>
             <a:endParaRPr lang="en-US" altLang="zh-CN" sz="2000" b="1"/>
@@ -6386,7 +6352,7 @@
           <p:nvPr/>
         </p:nvPicPr>
         <p:blipFill>
-          <a:blip r:embed="rId2"/>
+          <a:blip r:embed="rId4"/>
           <a:stretch>
             <a:fillRect/>
           </a:stretch>
@@ -6421,12 +6387,12 @@
           <a:bodyPr wrap="square" rtlCol="0">
             <a:spAutoFit/>
           </a:bodyPr>
+          <a:lstStyle/>
           <a:p>
             <a:r>
               <a:rPr lang="zh-CN" altLang="en-US"/>
               <a:t>架构设计图</a:t>
             </a:r>
-            <a:endParaRPr lang="zh-CN" altLang="en-US"/>
           </a:p>
         </p:txBody>
       </p:sp>
@@ -6435,13 +6401,6 @@
   <p:clrMapOvr>
     <a:masterClrMapping/>
   </p:clrMapOvr>
-  <p:timing>
-    <p:tnLst>
-      <p:par>
-        <p:cTn id="1" dur="indefinite" restart="never" nodeType="tmRoot"/>
-      </p:par>
-    </p:tnLst>
-  </p:timing>
 </p:sld>
 </file>
 
@@ -6715,13 +6674,6 @@
               </a:rPr>
               <a:t>系统设计</a:t>
             </a:r>
-            <a:endParaRPr lang="zh-CN" altLang="en-US" sz="3600" b="1" dirty="0">
-              <a:solidFill>
-                <a:schemeClr val="bg1"/>
-              </a:solidFill>
-              <a:latin typeface="等线" panose="02010600030101010101" pitchFamily="2" charset="-122"/>
-              <a:sym typeface="等线" panose="02010600030101010101" pitchFamily="2" charset="-122"/>
-            </a:endParaRPr>
           </a:p>
         </p:txBody>
       </p:sp>
@@ -6734,7 +6686,7 @@
           <p:nvPr/>
         </p:nvPicPr>
         <p:blipFill>
-          <a:blip r:embed="rId1" cstate="print">
+          <a:blip r:embed="rId3" cstate="print">
             <a:extLst>
               <a:ext uri="{28A0092B-C50C-407E-A947-70E740481C1C}">
                 <a14:useLocalDpi xmlns:a14="http://schemas.microsoft.com/office/drawing/2010/main" val="0"/>
@@ -6803,10 +6755,6 @@
               </a:rPr>
               <a:t>模块层次划分</a:t>
             </a:r>
-            <a:endParaRPr lang="zh-CN" altLang="en-US" b="1" dirty="0">
-              <a:latin typeface="Microsoft YaHei UI" panose="020B0503020204020204" pitchFamily="34" charset="-122"/>
-              <a:ea typeface="Microsoft YaHei UI" panose="020B0503020204020204" pitchFamily="34" charset="-122"/>
-            </a:endParaRPr>
           </a:p>
         </p:txBody>
       </p:sp>
@@ -6819,7 +6767,7 @@
           <p:nvPr/>
         </p:nvPicPr>
         <p:blipFill>
-          <a:blip r:embed="rId2"/>
+          <a:blip r:embed="rId4"/>
           <a:stretch>
             <a:fillRect/>
           </a:stretch>
@@ -6854,6 +6802,7 @@
           <a:bodyPr wrap="square" rtlCol="0">
             <a:noAutofit/>
           </a:bodyPr>
+          <a:lstStyle/>
           <a:p>
             <a:r>
               <a:rPr lang="zh-CN" altLang="en-US" sz="2000" b="1">
@@ -6861,9 +6810,6 @@
               </a:rPr>
               <a:t>业务服务接入模块：</a:t>
             </a:r>
-            <a:endParaRPr lang="zh-CN" altLang="en-US" sz="2000" b="1">
-              <a:sym typeface="+mn-ea"/>
-            </a:endParaRPr>
           </a:p>
           <a:p>
             <a:r>
@@ -7028,9 +6974,6 @@
               </a:rPr>
               <a:t>信息配置管理模块：</a:t>
             </a:r>
-            <a:endParaRPr lang="zh-CN" altLang="en-US" sz="2000" b="1">
-              <a:sym typeface="+mn-ea"/>
-            </a:endParaRPr>
           </a:p>
           <a:p>
             <a:r>
@@ -7045,9 +6988,6 @@
               </a:rPr>
               <a:t>负责服务实例、配置信息的持久化与监听订阅管理。</a:t>
             </a:r>
-            <a:endParaRPr lang="zh-CN" altLang="en-US" u="sng">
-              <a:sym typeface="+mn-ea"/>
-            </a:endParaRPr>
           </a:p>
           <a:p>
             <a:r>
@@ -7056,9 +6996,6 @@
               </a:rPr>
               <a:t>服务通用模块：</a:t>
             </a:r>
-            <a:endParaRPr lang="zh-CN" altLang="en-US" b="1">
-              <a:sym typeface="+mn-ea"/>
-            </a:endParaRPr>
           </a:p>
           <a:p>
             <a:r>
@@ -7103,12 +7040,12 @@
           <a:bodyPr wrap="square" rtlCol="0">
             <a:spAutoFit/>
           </a:bodyPr>
+          <a:lstStyle/>
           <a:p>
             <a:r>
               <a:rPr lang="zh-CN" altLang="en-US"/>
               <a:t>模块层次划分图</a:t>
             </a:r>
-            <a:endParaRPr lang="zh-CN" altLang="en-US"/>
           </a:p>
         </p:txBody>
       </p:sp>
@@ -7117,13 +7054,6 @@
   <p:clrMapOvr>
     <a:masterClrMapping/>
   </p:clrMapOvr>
-  <p:timing>
-    <p:tnLst>
-      <p:par>
-        <p:cTn id="1" dur="indefinite" restart="never" nodeType="tmRoot"/>
-      </p:par>
-    </p:tnLst>
-  </p:timing>
 </p:sld>
 </file>
 
@@ -7397,13 +7327,6 @@
               </a:rPr>
               <a:t>系统设计</a:t>
             </a:r>
-            <a:endParaRPr lang="zh-CN" altLang="en-US" sz="3600" b="1" dirty="0">
-              <a:solidFill>
-                <a:schemeClr val="bg1"/>
-              </a:solidFill>
-              <a:latin typeface="等线" panose="02010600030101010101" pitchFamily="2" charset="-122"/>
-              <a:sym typeface="等线" panose="02010600030101010101" pitchFamily="2" charset="-122"/>
-            </a:endParaRPr>
           </a:p>
         </p:txBody>
       </p:sp>
@@ -7416,7 +7339,7 @@
           <p:nvPr/>
         </p:nvPicPr>
         <p:blipFill>
-          <a:blip r:embed="rId1" cstate="print">
+          <a:blip r:embed="rId3" cstate="print">
             <a:extLst>
               <a:ext uri="{28A0092B-C50C-407E-A947-70E740481C1C}">
                 <a14:useLocalDpi xmlns:a14="http://schemas.microsoft.com/office/drawing/2010/main" val="0"/>
@@ -7485,10 +7408,6 @@
               </a:rPr>
               <a:t>数据库设计</a:t>
             </a:r>
-            <a:endParaRPr lang="zh-CN" altLang="en-US" b="1" dirty="0">
-              <a:latin typeface="Microsoft YaHei UI" panose="020B0503020204020204" pitchFamily="34" charset="-122"/>
-              <a:ea typeface="Microsoft YaHei UI" panose="020B0503020204020204" pitchFamily="34" charset="-122"/>
-            </a:endParaRPr>
           </a:p>
         </p:txBody>
       </p:sp>
@@ -7501,7 +7420,7 @@
           <p:nvPr/>
         </p:nvPicPr>
         <p:blipFill>
-          <a:blip r:embed="rId2"/>
+          <a:blip r:embed="rId4"/>
           <a:stretch>
             <a:fillRect/>
           </a:stretch>
@@ -7525,7 +7444,7 @@
           <p:nvPr/>
         </p:nvPicPr>
         <p:blipFill>
-          <a:blip r:embed="rId3"/>
+          <a:blip r:embed="rId5"/>
           <a:stretch>
             <a:fillRect/>
           </a:stretch>
@@ -7549,7 +7468,7 @@
           <p:nvPr/>
         </p:nvPicPr>
         <p:blipFill>
-          <a:blip r:embed="rId4"/>
+          <a:blip r:embed="rId6"/>
           <a:stretch>
             <a:fillRect/>
           </a:stretch>
@@ -7573,7 +7492,7 @@
           <p:nvPr/>
         </p:nvPicPr>
         <p:blipFill>
-          <a:blip r:embed="rId5"/>
+          <a:blip r:embed="rId7"/>
           <a:stretch>
             <a:fillRect/>
           </a:stretch>
@@ -7608,6 +7527,7 @@
           <a:bodyPr wrap="square" rtlCol="0">
             <a:spAutoFit/>
           </a:bodyPr>
+          <a:lstStyle/>
           <a:p>
             <a:r>
               <a:rPr lang="en-US" altLang="zh-CN"/>
@@ -7617,7 +7537,6 @@
               <a:rPr lang="zh-CN" altLang="en-US"/>
               <a:t>关系图</a:t>
             </a:r>
-            <a:endParaRPr lang="zh-CN" altLang="en-US"/>
           </a:p>
         </p:txBody>
       </p:sp>
@@ -7626,13 +7545,6 @@
   <p:clrMapOvr>
     <a:masterClrMapping/>
   </p:clrMapOvr>
-  <p:timing>
-    <p:tnLst>
-      <p:par>
-        <p:cTn id="1" dur="indefinite" restart="never" nodeType="tmRoot"/>
-      </p:par>
-    </p:tnLst>
-  </p:timing>
 </p:sld>
 </file>
 
@@ -8111,14 +8023,6 @@
               </a:rPr>
               <a:t>System Implementation</a:t>
             </a:r>
-            <a:endParaRPr lang="en-US" altLang="zh-CN" sz="1600" b="1" dirty="0">
-              <a:solidFill>
-                <a:srgbClr val="6E0F6D"/>
-              </a:solidFill>
-              <a:latin typeface="+mn-ea"/>
-              <a:cs typeface="+mn-ea"/>
-              <a:sym typeface="+mn-lt"/>
-            </a:endParaRPr>
           </a:p>
         </p:txBody>
       </p:sp>
@@ -8153,13 +8057,6 @@
               </a:rPr>
               <a:t>系统实现</a:t>
             </a:r>
-            <a:endParaRPr lang="zh-CN" altLang="en-US" sz="4000" b="1" dirty="0">
-              <a:solidFill>
-                <a:srgbClr val="6E0F6D"/>
-              </a:solidFill>
-              <a:latin typeface="+mn-ea"/>
-              <a:cs typeface="+mn-ea"/>
-            </a:endParaRPr>
           </a:p>
         </p:txBody>
       </p:sp>
@@ -8299,7 +8196,7 @@
           <p:nvPr/>
         </p:nvPicPr>
         <p:blipFill>
-          <a:blip r:embed="rId4">
+          <a:blip r:embed="rId6">
             <a:extLst>
               <a:ext uri="{28A0092B-C50C-407E-A947-70E740481C1C}">
                 <a14:useLocalDpi xmlns:a14="http://schemas.microsoft.com/office/drawing/2010/main" val="0"/>
@@ -8402,7 +8299,7 @@
           <p:nvPr/>
         </p:nvPicPr>
         <p:blipFill>
-          <a:blip r:embed="rId1" cstate="print">
+          <a:blip r:embed="rId3" cstate="print">
             <a:extLst>
               <a:ext uri="{28A0092B-C50C-407E-A947-70E740481C1C}">
                 <a14:useLocalDpi xmlns:a14="http://schemas.microsoft.com/office/drawing/2010/main" val="0"/>
@@ -8628,13 +8525,6 @@
               </a:rPr>
               <a:t>系统实现</a:t>
             </a:r>
-            <a:endParaRPr lang="zh-CN" altLang="en-US" sz="3600" b="1" dirty="0">
-              <a:solidFill>
-                <a:schemeClr val="bg1"/>
-              </a:solidFill>
-              <a:latin typeface="等线" panose="02010600030101010101" pitchFamily="2" charset="-122"/>
-              <a:sym typeface="等线" panose="02010600030101010101" pitchFamily="2" charset="-122"/>
-            </a:endParaRPr>
           </a:p>
         </p:txBody>
       </p:sp>
@@ -8685,10 +8575,6 @@
               </a:rPr>
               <a:t>服务调用</a:t>
             </a:r>
-            <a:endParaRPr lang="zh-CN" altLang="en-US" sz="2000" b="1" dirty="0">
-              <a:latin typeface="+mn-ea"/>
-              <a:ea typeface="+mn-ea"/>
-            </a:endParaRPr>
           </a:p>
         </p:txBody>
       </p:sp>
@@ -8701,7 +8587,7 @@
           <p:nvPr/>
         </p:nvPicPr>
         <p:blipFill>
-          <a:blip r:embed="rId2"/>
+          <a:blip r:embed="rId4"/>
           <a:stretch>
             <a:fillRect/>
           </a:stretch>
@@ -8730,7 +8616,7 @@
           <p:nvPr/>
         </p:nvPicPr>
         <p:blipFill>
-          <a:blip r:embed="rId3"/>
+          <a:blip r:embed="rId5"/>
           <a:srcRect r="67667"/>
           <a:stretch>
             <a:fillRect/>
@@ -8771,6 +8657,7 @@
           <a:bodyPr wrap="square" rtlCol="0">
             <a:spAutoFit/>
           </a:bodyPr>
+          <a:lstStyle/>
           <a:p>
             <a:r>
               <a:rPr lang="zh-CN" altLang="en-US"/>
@@ -8792,7 +8679,6 @@
               <a:rPr lang="zh-CN" altLang="en-US"/>
               <a:t>服务调用</a:t>
             </a:r>
-            <a:endParaRPr lang="zh-CN" altLang="en-US"/>
           </a:p>
         </p:txBody>
       </p:sp>
@@ -8816,6 +8702,7 @@
           <a:bodyPr wrap="square" rtlCol="0">
             <a:spAutoFit/>
           </a:bodyPr>
+          <a:lstStyle/>
           <a:p>
             <a:r>
               <a:rPr lang="zh-CN" altLang="en-US"/>
@@ -8837,7 +8724,6 @@
               <a:rPr lang="zh-CN" altLang="en-US"/>
               <a:t>服务调用</a:t>
             </a:r>
-            <a:endParaRPr lang="zh-CN" altLang="en-US"/>
           </a:p>
         </p:txBody>
       </p:sp>
@@ -8923,7 +8809,7 @@
           <p:nvPr/>
         </p:nvPicPr>
         <p:blipFill>
-          <a:blip r:embed="rId1" cstate="print">
+          <a:blip r:embed="rId3" cstate="print">
             <a:extLst>
               <a:ext uri="{28A0092B-C50C-407E-A947-70E740481C1C}">
                 <a14:useLocalDpi xmlns:a14="http://schemas.microsoft.com/office/drawing/2010/main" val="0"/>
@@ -9149,13 +9035,6 @@
               </a:rPr>
               <a:t>系统实现</a:t>
             </a:r>
-            <a:endParaRPr lang="zh-CN" altLang="en-US" sz="3600" b="1" dirty="0">
-              <a:solidFill>
-                <a:schemeClr val="bg1"/>
-              </a:solidFill>
-              <a:latin typeface="等线" panose="02010600030101010101" pitchFamily="2" charset="-122"/>
-              <a:sym typeface="等线" panose="02010600030101010101" pitchFamily="2" charset="-122"/>
-            </a:endParaRPr>
           </a:p>
         </p:txBody>
       </p:sp>
@@ -9206,10 +9085,6 @@
               </a:rPr>
               <a:t>压测效果</a:t>
             </a:r>
-            <a:endParaRPr lang="zh-CN" altLang="en-US" sz="2000" b="1" dirty="0">
-              <a:latin typeface="+mn-ea"/>
-              <a:ea typeface="+mn-ea"/>
-            </a:endParaRPr>
           </a:p>
         </p:txBody>
       </p:sp>
@@ -9222,7 +9097,7 @@
           <p:nvPr/>
         </p:nvPicPr>
         <p:blipFill>
-          <a:blip r:embed="rId2"/>
+          <a:blip r:embed="rId4"/>
           <a:stretch>
             <a:fillRect/>
           </a:stretch>
@@ -9246,7 +9121,7 @@
           <p:nvPr/>
         </p:nvPicPr>
         <p:blipFill>
-          <a:blip r:embed="rId3"/>
+          <a:blip r:embed="rId5"/>
           <a:stretch>
             <a:fillRect/>
           </a:stretch>
@@ -9270,7 +9145,7 @@
           <p:nvPr/>
         </p:nvPicPr>
         <p:blipFill>
-          <a:blip r:embed="rId4"/>
+          <a:blip r:embed="rId6"/>
           <a:stretch>
             <a:fillRect/>
           </a:stretch>
@@ -9305,6 +9180,7 @@
           <a:bodyPr wrap="square" rtlCol="0">
             <a:spAutoFit/>
           </a:bodyPr>
+          <a:lstStyle/>
           <a:p>
             <a:r>
               <a:rPr lang="zh-CN" altLang="en-US" sz="1600">
@@ -9336,6 +9212,7 @@
           <a:bodyPr wrap="square" rtlCol="0">
             <a:spAutoFit/>
           </a:bodyPr>
+          <a:lstStyle/>
           <a:p>
             <a:r>
               <a:rPr lang="zh-CN" altLang="en-US" sz="1600">
@@ -9429,7 +9306,7 @@
           <p:nvPr/>
         </p:nvPicPr>
         <p:blipFill>
-          <a:blip r:embed="rId1" cstate="print">
+          <a:blip r:embed="rId3" cstate="print">
             <a:extLst>
               <a:ext uri="{28A0092B-C50C-407E-A947-70E740481C1C}">
                 <a14:useLocalDpi xmlns:a14="http://schemas.microsoft.com/office/drawing/2010/main" val="0"/>
@@ -9655,13 +9532,6 @@
               </a:rPr>
               <a:t>系统实现</a:t>
             </a:r>
-            <a:endParaRPr lang="zh-CN" altLang="en-US" sz="3600" b="1" dirty="0">
-              <a:solidFill>
-                <a:schemeClr val="bg1"/>
-              </a:solidFill>
-              <a:latin typeface="等线" panose="02010600030101010101" pitchFamily="2" charset="-122"/>
-              <a:sym typeface="等线" panose="02010600030101010101" pitchFamily="2" charset="-122"/>
-            </a:endParaRPr>
           </a:p>
         </p:txBody>
       </p:sp>
@@ -9712,10 +9582,6 @@
               </a:rPr>
               <a:t>运维管理</a:t>
             </a:r>
-            <a:endParaRPr lang="zh-CN" altLang="en-US" sz="2000" b="1" dirty="0">
-              <a:latin typeface="+mn-ea"/>
-              <a:ea typeface="+mn-ea"/>
-            </a:endParaRPr>
           </a:p>
         </p:txBody>
       </p:sp>
@@ -9728,7 +9594,7 @@
           <p:nvPr/>
         </p:nvPicPr>
         <p:blipFill>
-          <a:blip r:embed="rId2"/>
+          <a:blip r:embed="rId4"/>
           <a:srcRect r="8622"/>
           <a:stretch>
             <a:fillRect/>
@@ -9758,7 +9624,7 @@
           <p:nvPr/>
         </p:nvPicPr>
         <p:blipFill>
-          <a:blip r:embed="rId3"/>
+          <a:blip r:embed="rId5"/>
           <a:srcRect r="23988" b="2470"/>
           <a:stretch>
             <a:fillRect/>
@@ -9788,7 +9654,7 @@
           <p:nvPr/>
         </p:nvPicPr>
         <p:blipFill>
-          <a:blip r:embed="rId4"/>
+          <a:blip r:embed="rId6"/>
           <a:stretch>
             <a:fillRect/>
           </a:stretch>
@@ -9828,12 +9694,12 @@
           <a:bodyPr wrap="square" rtlCol="0">
             <a:spAutoFit/>
           </a:bodyPr>
+          <a:lstStyle/>
           <a:p>
             <a:r>
               <a:rPr lang="zh-CN"/>
               <a:t>插件列表效果图</a:t>
             </a:r>
-            <a:endParaRPr lang="zh-CN"/>
           </a:p>
         </p:txBody>
       </p:sp>
@@ -9857,12 +9723,12 @@
           <a:bodyPr wrap="square" rtlCol="0">
             <a:spAutoFit/>
           </a:bodyPr>
+          <a:lstStyle/>
           <a:p>
             <a:r>
               <a:rPr lang="zh-CN"/>
               <a:t>服务列表效果图</a:t>
             </a:r>
-            <a:endParaRPr lang="zh-CN"/>
           </a:p>
         </p:txBody>
       </p:sp>
@@ -9886,12 +9752,12 @@
           <a:bodyPr wrap="square" rtlCol="0">
             <a:spAutoFit/>
           </a:bodyPr>
+          <a:lstStyle/>
           <a:p>
             <a:r>
               <a:rPr lang="zh-CN"/>
               <a:t>规则配置效果图</a:t>
             </a:r>
-            <a:endParaRPr lang="zh-CN"/>
           </a:p>
         </p:txBody>
       </p:sp>
@@ -9977,7 +9843,7 @@
           <p:nvPr/>
         </p:nvPicPr>
         <p:blipFill>
-          <a:blip r:embed="rId1" cstate="print">
+          <a:blip r:embed="rId3" cstate="print">
             <a:extLst>
               <a:ext uri="{28A0092B-C50C-407E-A947-70E740481C1C}">
                 <a14:useLocalDpi xmlns:a14="http://schemas.microsoft.com/office/drawing/2010/main" val="0"/>
@@ -10203,13 +10069,6 @@
               </a:rPr>
               <a:t>系统实现</a:t>
             </a:r>
-            <a:endParaRPr lang="zh-CN" altLang="en-US" sz="3600" b="1" dirty="0">
-              <a:solidFill>
-                <a:schemeClr val="bg1"/>
-              </a:solidFill>
-              <a:latin typeface="等线" panose="02010600030101010101" pitchFamily="2" charset="-122"/>
-              <a:sym typeface="等线" panose="02010600030101010101" pitchFamily="2" charset="-122"/>
-            </a:endParaRPr>
           </a:p>
         </p:txBody>
       </p:sp>
@@ -10260,10 +10119,6 @@
               </a:rPr>
               <a:t>监控管理</a:t>
             </a:r>
-            <a:endParaRPr lang="zh-CN" altLang="en-US" sz="2000" b="1" dirty="0">
-              <a:latin typeface="+mn-ea"/>
-              <a:ea typeface="+mn-ea"/>
-            </a:endParaRPr>
           </a:p>
         </p:txBody>
       </p:sp>
@@ -10276,7 +10131,7 @@
           <p:nvPr/>
         </p:nvPicPr>
         <p:blipFill>
-          <a:blip r:embed="rId2"/>
+          <a:blip r:embed="rId4"/>
           <a:stretch>
             <a:fillRect/>
           </a:stretch>
@@ -10316,6 +10171,7 @@
           <a:bodyPr wrap="square" rtlCol="0">
             <a:spAutoFit/>
           </a:bodyPr>
+          <a:lstStyle/>
           <a:p>
             <a:r>
               <a:rPr lang="zh-CN"/>
@@ -10329,7 +10185,6 @@
               <a:rPr lang="zh-CN" altLang="en-US"/>
               <a:t>查看指标数据效果图</a:t>
             </a:r>
-            <a:endParaRPr lang="zh-CN" altLang="en-US"/>
           </a:p>
         </p:txBody>
       </p:sp>
@@ -10342,7 +10197,7 @@
           <p:nvPr/>
         </p:nvPicPr>
         <p:blipFill>
-          <a:blip r:embed="rId3"/>
+          <a:blip r:embed="rId5"/>
           <a:stretch>
             <a:fillRect/>
           </a:stretch>
@@ -10377,6 +10232,7 @@
           <a:bodyPr wrap="square" rtlCol="0">
             <a:spAutoFit/>
           </a:bodyPr>
+          <a:lstStyle/>
           <a:p>
             <a:r>
               <a:rPr lang="zh-CN"/>
@@ -10390,7 +10246,6 @@
               <a:rPr lang="zh-CN" altLang="en-US"/>
               <a:t>实现告警通知</a:t>
             </a:r>
-            <a:endParaRPr lang="zh-CN" altLang="en-US"/>
           </a:p>
         </p:txBody>
       </p:sp>
@@ -10497,13 +10352,6 @@
               </a:rPr>
               <a:t>敬请各位老师批评指正</a:t>
             </a:r>
-            <a:endParaRPr lang="zh-CN" altLang="en-US" sz="4400" b="1" dirty="0">
-              <a:solidFill>
-                <a:schemeClr val="bg1"/>
-              </a:solidFill>
-              <a:latin typeface="黑体" panose="02010609060101010101" pitchFamily="49" charset="-122"/>
-              <a:ea typeface="黑体" panose="02010609060101010101" pitchFamily="49" charset="-122"/>
-            </a:endParaRPr>
           </a:p>
         </p:txBody>
       </p:sp>
@@ -10628,7 +10476,7 @@
           <p:nvPr/>
         </p:nvPicPr>
         <p:blipFill>
-          <a:blip r:embed="rId1">
+          <a:blip r:embed="rId3">
             <a:extLst>
               <a:ext uri="{28A0092B-C50C-407E-A947-70E740481C1C}">
                 <a14:useLocalDpi xmlns:a14="http://schemas.microsoft.com/office/drawing/2010/main" val="0"/>
@@ -10658,7 +10506,7 @@
           <p:nvPr/>
         </p:nvPicPr>
         <p:blipFill>
-          <a:blip r:embed="rId2">
+          <a:blip r:embed="rId4">
             <a:extLst>
               <a:ext uri="{28A0092B-C50C-407E-A947-70E740481C1C}">
                 <a14:useLocalDpi xmlns:a14="http://schemas.microsoft.com/office/drawing/2010/main" val="0"/>
@@ -10709,11 +10557,6 @@
               </a:rPr>
               <a:t>硕士毕业论文答辩</a:t>
             </a:r>
-            <a:endParaRPr lang="zh-CN" altLang="en-US" sz="3200" b="1" dirty="0">
-              <a:solidFill>
-                <a:srgbClr val="6B0060"/>
-              </a:solidFill>
-            </a:endParaRPr>
           </a:p>
         </p:txBody>
       </p:sp>
@@ -10913,13 +10756,6 @@
               </a:rPr>
               <a:t>目 录</a:t>
             </a:r>
-            <a:endParaRPr lang="zh-CN" altLang="en-US" sz="3200" b="1" dirty="0">
-              <a:solidFill>
-                <a:schemeClr val="bg1"/>
-              </a:solidFill>
-              <a:latin typeface="黑体" panose="02010609060101010101" pitchFamily="49" charset="-122"/>
-              <a:ea typeface="黑体" panose="02010609060101010101" pitchFamily="49" charset="-122"/>
-            </a:endParaRPr>
           </a:p>
         </p:txBody>
       </p:sp>
@@ -11431,13 +11267,6 @@
               </a:rPr>
               <a:t>Requirement Analysis</a:t>
             </a:r>
-            <a:endParaRPr lang="en-US" altLang="zh-CN" sz="1400" b="1" dirty="0">
-              <a:solidFill>
-                <a:schemeClr val="bg1">
-                  <a:lumMod val="75000"/>
-                </a:schemeClr>
-              </a:solidFill>
-            </a:endParaRPr>
           </a:p>
         </p:txBody>
       </p:sp>
@@ -11769,13 +11598,6 @@
               </a:rPr>
               <a:t>System Design</a:t>
             </a:r>
-            <a:endParaRPr lang="en-US" altLang="zh-CN" sz="1400" b="1" dirty="0">
-              <a:solidFill>
-                <a:schemeClr val="bg1">
-                  <a:lumMod val="75000"/>
-                </a:schemeClr>
-              </a:solidFill>
-            </a:endParaRPr>
           </a:p>
         </p:txBody>
       </p:sp>
@@ -12107,13 +11929,6 @@
               </a:rPr>
               <a:t>System Implementation</a:t>
             </a:r>
-            <a:endParaRPr lang="en-US" altLang="zh-CN" sz="1400" b="1" dirty="0">
-              <a:solidFill>
-                <a:schemeClr val="bg1">
-                  <a:lumMod val="75000"/>
-                </a:schemeClr>
-              </a:solidFill>
-            </a:endParaRPr>
           </a:p>
         </p:txBody>
       </p:sp>
@@ -12126,7 +11941,7 @@
           <p:nvPr/>
         </p:nvPicPr>
         <p:blipFill>
-          <a:blip r:embed="rId1">
+          <a:blip r:embed="rId3">
             <a:extLst>
               <a:ext uri="{28A0092B-C50C-407E-A947-70E740481C1C}">
                 <a14:useLocalDpi xmlns:a14="http://schemas.microsoft.com/office/drawing/2010/main" val="0"/>
@@ -12654,14 +12469,6 @@
               </a:rPr>
               <a:t>Project Background</a:t>
             </a:r>
-            <a:endParaRPr lang="en-US" altLang="zh-CN" sz="1600" b="1" dirty="0">
-              <a:solidFill>
-                <a:srgbClr val="6E0F6D"/>
-              </a:solidFill>
-              <a:latin typeface="+mn-ea"/>
-              <a:cs typeface="+mn-ea"/>
-              <a:sym typeface="+mn-lt"/>
-            </a:endParaRPr>
           </a:p>
         </p:txBody>
       </p:sp>
@@ -12696,13 +12503,6 @@
               </a:rPr>
               <a:t>项目背景</a:t>
             </a:r>
-            <a:endParaRPr lang="zh-CN" altLang="en-US" sz="4000" b="1" dirty="0">
-              <a:solidFill>
-                <a:srgbClr val="6E0F6D"/>
-              </a:solidFill>
-              <a:latin typeface="+mn-ea"/>
-              <a:cs typeface="+mn-ea"/>
-            </a:endParaRPr>
           </a:p>
         </p:txBody>
       </p:sp>
@@ -12842,7 +12642,7 @@
           <p:nvPr/>
         </p:nvPicPr>
         <p:blipFill>
-          <a:blip r:embed="rId4">
+          <a:blip r:embed="rId6">
             <a:extLst>
               <a:ext uri="{28A0092B-C50C-407E-A947-70E740481C1C}">
                 <a14:useLocalDpi xmlns:a14="http://schemas.microsoft.com/office/drawing/2010/main" val="0"/>
@@ -13141,13 +12941,6 @@
               </a:rPr>
               <a:t>项目背景</a:t>
             </a:r>
-            <a:endParaRPr lang="zh-CN" altLang="en-US" sz="3600" b="1" dirty="0">
-              <a:solidFill>
-                <a:schemeClr val="bg1"/>
-              </a:solidFill>
-              <a:latin typeface="等线" panose="02010600030101010101" pitchFamily="2" charset="-122"/>
-              <a:sym typeface="等线" panose="02010600030101010101" pitchFamily="2" charset="-122"/>
-            </a:endParaRPr>
           </a:p>
           <a:p>
             <a:pPr marL="0" indent="0">
@@ -14494,13 +14287,6 @@
               </a:rPr>
               <a:t>业务背景</a:t>
             </a:r>
-            <a:endParaRPr lang="zh-CN" altLang="en-US" sz="1600" b="1" dirty="0">
-              <a:solidFill>
-                <a:srgbClr val="6B0060"/>
-              </a:solidFill>
-              <a:latin typeface="+mn-ea"/>
-              <a:sym typeface="等线" panose="02010600030101010101" pitchFamily="2" charset="-122"/>
-            </a:endParaRPr>
           </a:p>
         </p:txBody>
       </p:sp>
@@ -16704,13 +16490,6 @@
               </a:rPr>
               <a:t>本文关键工作</a:t>
             </a:r>
-            <a:endParaRPr lang="zh-CN" altLang="en-US" sz="1600" b="1" dirty="0">
-              <a:solidFill>
-                <a:srgbClr val="6B0060"/>
-              </a:solidFill>
-              <a:latin typeface="+mn-ea"/>
-              <a:sym typeface="等线" panose="02010600030101010101" pitchFamily="2" charset="-122"/>
-            </a:endParaRPr>
           </a:p>
         </p:txBody>
       </p:sp>
@@ -16775,13 +16554,6 @@
               </a:rPr>
               <a:t>传统解决方案</a:t>
             </a:r>
-            <a:endParaRPr lang="zh-CN" altLang="en-US" sz="2000" b="1" dirty="0">
-              <a:solidFill>
-                <a:srgbClr val="6B0060"/>
-              </a:solidFill>
-              <a:latin typeface="+mn-ea"/>
-              <a:sym typeface="等线" panose="02010600030101010101" pitchFamily="2" charset="-122"/>
-            </a:endParaRPr>
           </a:p>
           <a:p>
             <a:pPr>
@@ -16808,6 +16580,60 @@
                 <a:sym typeface="等线" panose="02010600030101010101" pitchFamily="2" charset="-122"/>
               </a:rPr>
               <a:t>开源组件</a:t>
+            </a:r>
+          </a:p>
+          <a:p>
+            <a:pPr>
+              <a:lnSpc>
+                <a:spcPct val="130000"/>
+              </a:lnSpc>
+            </a:pPr>
+            <a:r>
+              <a:rPr lang="en-US" altLang="zh-CN" sz="1200" b="1" dirty="0">
+                <a:solidFill>
+                  <a:srgbClr val="6B0060"/>
+                </a:solidFill>
+                <a:latin typeface="+mn-ea"/>
+                <a:sym typeface="等线" panose="02010600030101010101" pitchFamily="2" charset="-122"/>
+              </a:rPr>
+              <a:t>- </a:t>
+            </a:r>
+            <a:r>
+              <a:rPr lang="zh-CN" altLang="en-US" sz="1200" b="1" dirty="0">
+                <a:solidFill>
+                  <a:srgbClr val="6B0060"/>
+                </a:solidFill>
+                <a:latin typeface="+mn-ea"/>
+                <a:sym typeface="等线" panose="02010600030101010101" pitchFamily="2" charset="-122"/>
+              </a:rPr>
+              <a:t>大多无法满足多类型的服务的直接调用</a:t>
+            </a:r>
+          </a:p>
+          <a:p>
+            <a:pPr>
+              <a:lnSpc>
+                <a:spcPct val="130000"/>
+              </a:lnSpc>
+            </a:pPr>
+            <a:r>
+              <a:rPr lang="en-US" altLang="zh-CN" sz="1200" b="1" dirty="0">
+                <a:solidFill>
+                  <a:srgbClr val="6B0060"/>
+                </a:solidFill>
+                <a:latin typeface="+mn-ea"/>
+                <a:sym typeface="等线" panose="02010600030101010101" pitchFamily="2" charset="-122"/>
+              </a:rPr>
+              <a:t>- </a:t>
+            </a:r>
+            <a:r>
+              <a:rPr lang="zh-CN" altLang="en-US" sz="1200" b="1" dirty="0">
+                <a:solidFill>
+                  <a:srgbClr val="6B0060"/>
+                </a:solidFill>
+                <a:latin typeface="+mn-ea"/>
+                <a:sym typeface="等线" panose="02010600030101010101" pitchFamily="2" charset="-122"/>
+              </a:rPr>
+              <a:t>性能、监控能力较弱</a:t>
             </a:r>
             <a:endParaRPr lang="zh-CN" altLang="en-US" sz="1600" b="1" dirty="0">
               <a:solidFill>
@@ -16824,32 +16650,25 @@
               </a:lnSpc>
             </a:pPr>
             <a:r>
-              <a:rPr lang="en-US" altLang="zh-CN" sz="1200" b="1" dirty="0">
+              <a:rPr lang="en-US" altLang="zh-CN" sz="1600" b="1" dirty="0">
                 <a:solidFill>
                   <a:srgbClr val="6B0060"/>
                 </a:solidFill>
                 <a:latin typeface="+mn-ea"/>
                 <a:sym typeface="等线" panose="02010600030101010101" pitchFamily="2" charset="-122"/>
               </a:rPr>
-              <a:t>- </a:t>
-            </a:r>
-            <a:r>
-              <a:rPr lang="zh-CN" altLang="en-US" sz="1200" b="1" dirty="0">
+              <a:t>2.</a:t>
+            </a:r>
+            <a:r>
+              <a:rPr lang="zh-CN" altLang="en-US" sz="1600" b="1" dirty="0">
                 <a:solidFill>
                   <a:srgbClr val="6B0060"/>
                 </a:solidFill>
                 <a:latin typeface="+mn-ea"/>
                 <a:sym typeface="等线" panose="02010600030101010101" pitchFamily="2" charset="-122"/>
               </a:rPr>
-              <a:t>大多无法满足多类型的服务的直接调用</a:t>
-            </a:r>
-            <a:endParaRPr lang="zh-CN" altLang="en-US" sz="1200" b="1" dirty="0">
-              <a:solidFill>
-                <a:srgbClr val="6B0060"/>
-              </a:solidFill>
-              <a:latin typeface="+mn-ea"/>
-              <a:sym typeface="等线" panose="02010600030101010101" pitchFamily="2" charset="-122"/>
-            </a:endParaRPr>
+              <a:t>基于开源组件自研</a:t>
+            </a:r>
           </a:p>
           <a:p>
             <a:pPr>
@@ -16865,7 +16684,7 @@
                 <a:latin typeface="+mn-ea"/>
                 <a:sym typeface="等线" panose="02010600030101010101" pitchFamily="2" charset="-122"/>
               </a:rPr>
-              <a:t>- </a:t>
+              <a:t>-</a:t>
             </a:r>
             <a:r>
               <a:rPr lang="zh-CN" altLang="en-US" sz="1200" b="1" dirty="0">
@@ -16875,15 +16694,8 @@
                 <a:latin typeface="+mn-ea"/>
                 <a:sym typeface="等线" panose="02010600030101010101" pitchFamily="2" charset="-122"/>
               </a:rPr>
-              <a:t>性能、监控能力较弱</a:t>
-            </a:r>
-            <a:endParaRPr lang="zh-CN" altLang="en-US" sz="1600" b="1" dirty="0">
-              <a:solidFill>
-                <a:srgbClr val="6B0060"/>
-              </a:solidFill>
-              <a:latin typeface="+mn-ea"/>
-              <a:sym typeface="等线" panose="02010600030101010101" pitchFamily="2" charset="-122"/>
-            </a:endParaRPr>
+              <a:t>改造成本较大</a:t>
+            </a:r>
           </a:p>
           <a:p>
             <a:pPr>
@@ -16899,7 +16711,7 @@
                 <a:latin typeface="+mn-ea"/>
                 <a:sym typeface="等线" panose="02010600030101010101" pitchFamily="2" charset="-122"/>
               </a:rPr>
-              <a:t>2.</a:t>
+              <a:t>3.</a:t>
             </a:r>
             <a:r>
               <a:rPr lang="zh-CN" altLang="en-US" sz="1600" b="1" dirty="0">
@@ -16909,15 +16721,8 @@
                 <a:latin typeface="+mn-ea"/>
                 <a:sym typeface="等线" panose="02010600030101010101" pitchFamily="2" charset="-122"/>
               </a:rPr>
-              <a:t>基于开源组件自研</a:t>
-            </a:r>
-            <a:endParaRPr lang="zh-CN" altLang="en-US" sz="1600" b="1" dirty="0">
-              <a:solidFill>
-                <a:srgbClr val="6B0060"/>
-              </a:solidFill>
-              <a:latin typeface="+mn-ea"/>
-              <a:sym typeface="等线" panose="02010600030101010101" pitchFamily="2" charset="-122"/>
-            </a:endParaRPr>
+              <a:t>托管云</a:t>
+            </a:r>
           </a:p>
           <a:p>
             <a:pPr>
@@ -16943,83 +16748,8 @@
                 <a:latin typeface="+mn-ea"/>
                 <a:sym typeface="等线" panose="02010600030101010101" pitchFamily="2" charset="-122"/>
               </a:rPr>
-              <a:t>改造成本较大</a:t>
-            </a:r>
-            <a:endParaRPr lang="zh-CN" altLang="en-US" sz="1200" b="1" dirty="0">
-              <a:solidFill>
-                <a:srgbClr val="6B0060"/>
-              </a:solidFill>
-              <a:latin typeface="+mn-ea"/>
-              <a:sym typeface="等线" panose="02010600030101010101" pitchFamily="2" charset="-122"/>
-            </a:endParaRPr>
-          </a:p>
-          <a:p>
-            <a:pPr>
-              <a:lnSpc>
-                <a:spcPct val="130000"/>
-              </a:lnSpc>
-            </a:pPr>
-            <a:r>
-              <a:rPr lang="en-US" altLang="zh-CN" sz="1600" b="1" dirty="0">
-                <a:solidFill>
-                  <a:srgbClr val="6B0060"/>
-                </a:solidFill>
-                <a:latin typeface="+mn-ea"/>
-                <a:sym typeface="等线" panose="02010600030101010101" pitchFamily="2" charset="-122"/>
-              </a:rPr>
-              <a:t>3.</a:t>
-            </a:r>
-            <a:r>
-              <a:rPr lang="zh-CN" altLang="en-US" sz="1600" b="1" dirty="0">
-                <a:solidFill>
-                  <a:srgbClr val="6B0060"/>
-                </a:solidFill>
-                <a:latin typeface="+mn-ea"/>
-                <a:sym typeface="等线" panose="02010600030101010101" pitchFamily="2" charset="-122"/>
-              </a:rPr>
-              <a:t>托管云</a:t>
-            </a:r>
-            <a:endParaRPr lang="zh-CN" altLang="en-US" sz="1600" b="1" dirty="0">
-              <a:solidFill>
-                <a:srgbClr val="6B0060"/>
-              </a:solidFill>
-              <a:latin typeface="+mn-ea"/>
-              <a:sym typeface="等线" panose="02010600030101010101" pitchFamily="2" charset="-122"/>
-            </a:endParaRPr>
-          </a:p>
-          <a:p>
-            <a:pPr>
-              <a:lnSpc>
-                <a:spcPct val="130000"/>
-              </a:lnSpc>
-            </a:pPr>
-            <a:r>
-              <a:rPr lang="en-US" altLang="zh-CN" sz="1200" b="1" dirty="0">
-                <a:solidFill>
-                  <a:srgbClr val="6B0060"/>
-                </a:solidFill>
-                <a:latin typeface="+mn-ea"/>
-                <a:sym typeface="等线" panose="02010600030101010101" pitchFamily="2" charset="-122"/>
-              </a:rPr>
-              <a:t>-</a:t>
-            </a:r>
-            <a:r>
-              <a:rPr lang="zh-CN" altLang="en-US" sz="1200" b="1" dirty="0">
-                <a:solidFill>
-                  <a:srgbClr val="6B0060"/>
-                </a:solidFill>
-                <a:latin typeface="+mn-ea"/>
-                <a:sym typeface="等线" panose="02010600030101010101" pitchFamily="2" charset="-122"/>
-              </a:rPr>
               <a:t>存在风险及可控问题</a:t>
             </a:r>
-            <a:endParaRPr lang="zh-CN" altLang="en-US" sz="1200" b="1" dirty="0">
-              <a:solidFill>
-                <a:srgbClr val="6B0060"/>
-              </a:solidFill>
-              <a:latin typeface="+mn-ea"/>
-              <a:sym typeface="等线" panose="02010600030101010101" pitchFamily="2" charset="-122"/>
-            </a:endParaRPr>
           </a:p>
           <a:p>
             <a:pPr>
@@ -17113,13 +16843,6 @@
               </a:rPr>
               <a:t>业务背景</a:t>
             </a:r>
-            <a:endParaRPr lang="zh-CN" altLang="en-US" sz="2000" b="1" dirty="0">
-              <a:solidFill>
-                <a:srgbClr val="6B0060"/>
-              </a:solidFill>
-              <a:latin typeface="+mn-ea"/>
-              <a:sym typeface="等线" panose="02010600030101010101" pitchFamily="2" charset="-122"/>
-            </a:endParaRPr>
           </a:p>
           <a:p>
             <a:pPr indent="0">
@@ -17146,12 +16869,6 @@
               </a:rPr>
               <a:t>软件行业发展迅猛，用户激增、业务场景复杂化</a:t>
             </a:r>
-            <a:endParaRPr lang="zh-CN" altLang="en-US" sz="1400" dirty="0">
-              <a:solidFill>
-                <a:schemeClr val="tx1"/>
-              </a:solidFill>
-              <a:sym typeface="等线" panose="02010600030101010101" pitchFamily="2" charset="-122"/>
-            </a:endParaRPr>
           </a:p>
           <a:p>
             <a:pPr indent="0">
@@ -17219,12 +16936,6 @@
               </a:rPr>
               <a:t>网关面临新挑战</a:t>
             </a:r>
-            <a:endParaRPr lang="zh-CN" altLang="en-US" sz="1400" dirty="0">
-              <a:solidFill>
-                <a:schemeClr val="tx1"/>
-              </a:solidFill>
-              <a:sym typeface="等线" panose="02010600030101010101" pitchFamily="2" charset="-122"/>
-            </a:endParaRPr>
           </a:p>
           <a:p>
             <a:pPr>
@@ -17250,12 +16961,6 @@
               </a:rPr>
               <a:t>网关成为其必备关键组件，性能及稳定性要求日益增加</a:t>
             </a:r>
-            <a:endParaRPr lang="zh-CN" altLang="en-US" sz="1000" dirty="0">
-              <a:solidFill>
-                <a:schemeClr val="tx1"/>
-              </a:solidFill>
-              <a:sym typeface="等线" panose="02010600030101010101" pitchFamily="2" charset="-122"/>
-            </a:endParaRPr>
           </a:p>
           <a:p>
             <a:pPr>
@@ -17281,12 +16986,6 @@
               </a:rPr>
               <a:t>微服务的类型及通信协议多样化</a:t>
             </a:r>
-            <a:endParaRPr lang="zh-CN" altLang="en-US" sz="1400" dirty="0">
-              <a:solidFill>
-                <a:schemeClr val="tx1"/>
-              </a:solidFill>
-              <a:sym typeface="等线" panose="02010600030101010101" pitchFamily="2" charset="-122"/>
-            </a:endParaRPr>
           </a:p>
           <a:p>
             <a:pPr>
@@ -17339,12 +17038,6 @@
               </a:rPr>
               <a:t>等系列类型服务</a:t>
             </a:r>
-            <a:endParaRPr lang="zh-CN" altLang="en-US" sz="1000" dirty="0">
-              <a:solidFill>
-                <a:schemeClr val="tx1"/>
-              </a:solidFill>
-              <a:sym typeface="等线" panose="02010600030101010101" pitchFamily="2" charset="-122"/>
-            </a:endParaRPr>
           </a:p>
           <a:p>
             <a:pPr>
@@ -17493,13 +17186,6 @@
               </a:rPr>
               <a:t>本文关键工作</a:t>
             </a:r>
-            <a:endParaRPr lang="zh-CN" altLang="en-US" sz="2000" b="1" dirty="0">
-              <a:solidFill>
-                <a:srgbClr val="6B0060"/>
-              </a:solidFill>
-              <a:latin typeface="+mn-ea"/>
-              <a:sym typeface="等线" panose="02010600030101010101" pitchFamily="2" charset="-122"/>
-            </a:endParaRPr>
           </a:p>
           <a:p>
             <a:pPr>
@@ -17547,13 +17233,6 @@
               </a:rPr>
               <a:t>网关</a:t>
             </a:r>
-            <a:endParaRPr lang="zh-CN" altLang="en-US" sz="1600" b="1" dirty="0">
-              <a:solidFill>
-                <a:srgbClr val="6B0060"/>
-              </a:solidFill>
-              <a:latin typeface="+mn-ea"/>
-              <a:sym typeface="等线" panose="02010600030101010101" pitchFamily="2" charset="-122"/>
-            </a:endParaRPr>
           </a:p>
           <a:p>
             <a:pPr>
@@ -17615,13 +17294,6 @@
               </a:rPr>
               <a:t>网关的性能和监控能力</a:t>
             </a:r>
-            <a:endParaRPr lang="zh-CN" altLang="en-US" sz="1600" b="1" dirty="0">
-              <a:solidFill>
-                <a:srgbClr val="6B0060"/>
-              </a:solidFill>
-              <a:latin typeface="+mn-ea"/>
-              <a:sym typeface="等线" panose="02010600030101010101" pitchFamily="2" charset="-122"/>
-            </a:endParaRPr>
           </a:p>
           <a:p>
             <a:pPr>
@@ -17673,13 +17345,6 @@
               </a:rPr>
               <a:t>性能及监控能力进而增加微服务治理能力和用户体验</a:t>
             </a:r>
-            <a:endParaRPr lang="zh-CN" altLang="en-US" b="1" u="sng" dirty="0">
-              <a:solidFill>
-                <a:srgbClr val="6B0060"/>
-              </a:solidFill>
-              <a:latin typeface="+mn-ea"/>
-              <a:sym typeface="等线" panose="02010600030101010101" pitchFamily="2" charset="-122"/>
-            </a:endParaRPr>
           </a:p>
           <a:p>
             <a:pPr>
@@ -17764,7 +17429,7 @@
           <p:nvPr/>
         </p:nvPicPr>
         <p:blipFill>
-          <a:blip r:embed="rId1" cstate="print">
+          <a:blip r:embed="rId3" cstate="print">
             <a:extLst>
               <a:ext uri="{28A0092B-C50C-407E-A947-70E740481C1C}">
                 <a14:useLocalDpi xmlns:a14="http://schemas.microsoft.com/office/drawing/2010/main" val="0"/>
@@ -18864,13 +18529,6 @@
               </a:rPr>
               <a:t>项目背景</a:t>
             </a:r>
-            <a:endParaRPr lang="zh-CN" altLang="en-US" sz="3600" b="1" dirty="0">
-              <a:solidFill>
-                <a:schemeClr val="bg1"/>
-              </a:solidFill>
-              <a:latin typeface="+mn-ea"/>
-              <a:sym typeface="等线" panose="02010600030101010101" pitchFamily="2" charset="-122"/>
-            </a:endParaRPr>
           </a:p>
         </p:txBody>
       </p:sp>
@@ -18883,7 +18541,7 @@
           <p:nvPr/>
         </p:nvPicPr>
         <p:blipFill>
-          <a:blip r:embed="rId1" cstate="print">
+          <a:blip r:embed="rId4" cstate="print">
             <a:extLst>
               <a:ext uri="{28A0092B-C50C-407E-A947-70E740481C1C}">
                 <a14:useLocalDpi xmlns:a14="http://schemas.microsoft.com/office/drawing/2010/main" val="0"/>
@@ -19111,16 +18769,6 @@
               </a:rPr>
               <a:t>用户鉴权、安全认证、流量标记</a:t>
             </a:r>
-            <a:endParaRPr lang="zh-CN" altLang="en-US" sz="1400" dirty="0">
-              <a:solidFill>
-                <a:schemeClr val="bg1">
-                  <a:lumMod val="50000"/>
-                </a:schemeClr>
-              </a:solidFill>
-              <a:latin typeface="+mn-ea"/>
-              <a:ea typeface="+mn-ea"/>
-              <a:sym typeface="等线" panose="02010600030101010101" pitchFamily="2" charset="-122"/>
-            </a:endParaRPr>
           </a:p>
         </p:txBody>
       </p:sp>
@@ -19314,11 +18962,6 @@
               </a:rPr>
               <a:t>基本作用</a:t>
             </a:r>
-            <a:endParaRPr lang="zh-CN" altLang="en-US" sz="2200" b="1" dirty="0">
-              <a:latin typeface="+mn-ea"/>
-              <a:ea typeface="+mn-ea"/>
-              <a:sym typeface="等线" panose="02010600030101010101" pitchFamily="2" charset="-122"/>
-            </a:endParaRPr>
           </a:p>
         </p:txBody>
       </p:sp>
@@ -19540,14 +19183,6 @@
               </a:rPr>
               <a:t>路由调用、协议转换</a:t>
             </a:r>
-            <a:endParaRPr lang="zh-CN" altLang="en-US" sz="1400" b="1" dirty="0">
-              <a:solidFill>
-                <a:srgbClr val="FF0000"/>
-              </a:solidFill>
-              <a:latin typeface="+mn-ea"/>
-              <a:ea typeface="+mn-ea"/>
-              <a:sym typeface="等线" panose="02010600030101010101" pitchFamily="2" charset="-122"/>
-            </a:endParaRPr>
           </a:p>
         </p:txBody>
       </p:sp>
@@ -19758,16 +19393,6 @@
               </a:rPr>
               <a:t>统计分析、报警通知</a:t>
             </a:r>
-            <a:endParaRPr lang="zh-CN" altLang="en-US" sz="1400" dirty="0">
-              <a:solidFill>
-                <a:schemeClr val="bg1">
-                  <a:lumMod val="50000"/>
-                </a:schemeClr>
-              </a:solidFill>
-              <a:latin typeface="+mn-ea"/>
-              <a:ea typeface="+mn-ea"/>
-              <a:sym typeface="等线" panose="02010600030101010101" pitchFamily="2" charset="-122"/>
-            </a:endParaRPr>
           </a:p>
         </p:txBody>
       </p:sp>
@@ -19777,7 +19402,7 @@
           <p:cNvSpPr txBox="1"/>
           <p:nvPr>
             <p:custDataLst>
-              <p:tags r:id="rId2"/>
+              <p:tags r:id="rId1"/>
             </p:custDataLst>
           </p:nvPr>
         </p:nvSpPr>
@@ -19820,19 +19445,8 @@
                 <a:latin typeface="+mn-ea"/>
                 <a:ea typeface="+mn-ea"/>
               </a:rPr>
-              <a:t>应用场景</a:t>
-            </a:r>
-            <a:r>
-              <a:rPr lang="zh-CN" altLang="en-US" sz="1600" dirty="0">
-                <a:latin typeface="+mn-ea"/>
-                <a:ea typeface="+mn-ea"/>
-              </a:rPr>
-              <a:t>图</a:t>
-            </a:r>
-            <a:endParaRPr lang="zh-CN" altLang="en-US" sz="1600" dirty="0">
-              <a:latin typeface="+mn-ea"/>
-              <a:ea typeface="+mn-ea"/>
-            </a:endParaRPr>
+              <a:t>应用场景图</a:t>
+            </a:r>
           </a:p>
         </p:txBody>
       </p:sp>
@@ -19845,7 +19459,7 @@
           <p:nvPr/>
         </p:nvPicPr>
         <p:blipFill>
-          <a:blip r:embed="rId3"/>
+          <a:blip r:embed="rId5"/>
           <a:stretch>
             <a:fillRect/>
           </a:stretch>
@@ -19862,7 +19476,7 @@
       </p:pic>
       <mc:AlternateContent xmlns:mc="http://schemas.openxmlformats.org/markup-compatibility/2006" xmlns:p14="http://schemas.microsoft.com/office/powerpoint/2010/main">
         <mc:Choice Requires="p14">
-          <p:contentPart r:id="rId4" p14:bwMode="auto">
+          <p:contentPart p14:bwMode="auto" r:id="rId6">
             <p14:nvContentPartPr>
               <p14:cNvPr id="14" name="墨迹 13"/>
               <p14:cNvContentPartPr/>
@@ -19880,7 +19494,7 @@
               <p:cNvPr id="14" name="墨迹 13"/>
             </p:nvPicPr>
             <p:blipFill>
-              <a:blip r:embed="rId5"/>
+              <a:blip r:embed="rId7"/>
             </p:blipFill>
             <p:spPr>
               <a:xfrm>
@@ -19894,7 +19508,7 @@
       </mc:AlternateContent>
       <mc:AlternateContent xmlns:mc="http://schemas.openxmlformats.org/markup-compatibility/2006" xmlns:p14="http://schemas.microsoft.com/office/powerpoint/2010/main">
         <mc:Choice Requires="p14">
-          <p:contentPart r:id="rId6" p14:bwMode="auto">
+          <p:contentPart p14:bwMode="auto" r:id="rId8">
             <p14:nvContentPartPr>
               <p14:cNvPr id="15" name="墨迹 14"/>
               <p14:cNvContentPartPr/>
@@ -19912,7 +19526,7 @@
               <p:cNvPr id="15" name="墨迹 14"/>
             </p:nvPicPr>
             <p:blipFill>
-              <a:blip r:embed="rId5"/>
+              <a:blip r:embed="rId7"/>
             </p:blipFill>
             <p:spPr>
               <a:xfrm>
@@ -19926,7 +19540,7 @@
       </mc:AlternateContent>
       <mc:AlternateContent xmlns:mc="http://schemas.openxmlformats.org/markup-compatibility/2006" xmlns:p14="http://schemas.microsoft.com/office/powerpoint/2010/main">
         <mc:Choice Requires="p14">
-          <p:contentPart r:id="rId7" p14:bwMode="auto">
+          <p:contentPart p14:bwMode="auto" r:id="rId9">
             <p14:nvContentPartPr>
               <p14:cNvPr id="16" name="墨迹 15"/>
               <p14:cNvContentPartPr/>
@@ -19944,7 +19558,7 @@
               <p:cNvPr id="16" name="墨迹 15"/>
             </p:nvPicPr>
             <p:blipFill>
-              <a:blip r:embed="rId5"/>
+              <a:blip r:embed="rId7"/>
             </p:blipFill>
             <p:spPr>
               <a:xfrm>
@@ -19958,7 +19572,7 @@
       </mc:AlternateContent>
       <mc:AlternateContent xmlns:mc="http://schemas.openxmlformats.org/markup-compatibility/2006" xmlns:p14="http://schemas.microsoft.com/office/powerpoint/2010/main">
         <mc:Choice Requires="p14">
-          <p:contentPart r:id="rId8" p14:bwMode="auto">
+          <p:contentPart p14:bwMode="auto" r:id="rId10">
             <p14:nvContentPartPr>
               <p14:cNvPr id="17" name="墨迹 16"/>
               <p14:cNvContentPartPr/>
@@ -19976,7 +19590,7 @@
               <p:cNvPr id="17" name="墨迹 16"/>
             </p:nvPicPr>
             <p:blipFill>
-              <a:blip r:embed="rId5"/>
+              <a:blip r:embed="rId7"/>
             </p:blipFill>
             <p:spPr>
               <a:xfrm>
@@ -19990,7 +19604,7 @@
       </mc:AlternateContent>
       <mc:AlternateContent xmlns:mc="http://schemas.openxmlformats.org/markup-compatibility/2006" xmlns:p14="http://schemas.microsoft.com/office/powerpoint/2010/main">
         <mc:Choice Requires="p14">
-          <p:contentPart r:id="rId9" p14:bwMode="auto">
+          <p:contentPart p14:bwMode="auto" r:id="rId11">
             <p14:nvContentPartPr>
               <p14:cNvPr id="18" name="墨迹 17"/>
               <p14:cNvContentPartPr/>
@@ -20008,7 +19622,7 @@
               <p:cNvPr id="18" name="墨迹 17"/>
             </p:nvPicPr>
             <p:blipFill>
-              <a:blip r:embed="rId5"/>
+              <a:blip r:embed="rId7"/>
             </p:blipFill>
             <p:spPr>
               <a:xfrm>
@@ -20114,6 +19728,7 @@
         </p:style>
         <p:txBody>
           <a:bodyPr rtlCol="0" anchor="ctr"/>
+          <a:lstStyle/>
           <a:p>
             <a:pPr algn="ctr"/>
             <a:endParaRPr lang="zh-CN" altLang="en-US"/>
@@ -20169,6 +19784,7 @@
         </p:style>
         <p:txBody>
           <a:bodyPr rtlCol="0" anchor="ctr"/>
+          <a:lstStyle/>
           <a:p>
             <a:pPr algn="ctr"/>
             <a:endParaRPr lang="zh-CN" altLang="en-US"/>
@@ -20224,6 +19840,7 @@
         </p:style>
         <p:txBody>
           <a:bodyPr rtlCol="0" anchor="ctr"/>
+          <a:lstStyle/>
           <a:p>
             <a:pPr algn="ctr"/>
             <a:endParaRPr lang="zh-CN" altLang="en-US"/>
@@ -20279,6 +19896,7 @@
         </p:style>
         <p:txBody>
           <a:bodyPr rtlCol="0" anchor="ctr"/>
+          <a:lstStyle/>
           <a:p>
             <a:pPr algn="ctr"/>
             <a:endParaRPr lang="zh-CN" altLang="en-US"/>
@@ -20305,6 +19923,7 @@
           <a:bodyPr wrap="square" rtlCol="0">
             <a:spAutoFit/>
           </a:bodyPr>
+          <a:lstStyle/>
           <a:p>
             <a:pPr>
               <a:lnSpc>
@@ -20319,11 +19938,6 @@
               </a:rPr>
               <a:t>基本应用场景</a:t>
             </a:r>
-            <a:endParaRPr lang="zh-CN" altLang="en-US" b="1" dirty="0">
-              <a:latin typeface="Microsoft YaHei UI" panose="020B0503020204020204" pitchFamily="34" charset="-122"/>
-              <a:ea typeface="Microsoft YaHei UI" panose="020B0503020204020204" pitchFamily="34" charset="-122"/>
-              <a:sym typeface="+mn-ea"/>
-            </a:endParaRPr>
           </a:p>
         </p:txBody>
       </p:sp>
@@ -21150,14 +20764,6 @@
               </a:rPr>
               <a:t>Requirement Analysis</a:t>
             </a:r>
-            <a:endParaRPr lang="en-US" altLang="zh-CN" sz="1600" b="1" dirty="0">
-              <a:solidFill>
-                <a:srgbClr val="6E0F6D"/>
-              </a:solidFill>
-              <a:latin typeface="+mn-ea"/>
-              <a:cs typeface="+mn-ea"/>
-              <a:sym typeface="+mn-lt"/>
-            </a:endParaRPr>
           </a:p>
         </p:txBody>
       </p:sp>
@@ -21192,13 +20798,6 @@
               </a:rPr>
               <a:t>需求分析</a:t>
             </a:r>
-            <a:endParaRPr lang="zh-CN" altLang="en-US" sz="4000" b="1" dirty="0">
-              <a:solidFill>
-                <a:srgbClr val="6E0F6D"/>
-              </a:solidFill>
-              <a:latin typeface="+mn-ea"/>
-              <a:cs typeface="+mn-ea"/>
-            </a:endParaRPr>
           </a:p>
         </p:txBody>
       </p:sp>
@@ -21338,7 +20937,7 @@
           <p:nvPr/>
         </p:nvPicPr>
         <p:blipFill>
-          <a:blip r:embed="rId4">
+          <a:blip r:embed="rId6">
             <a:extLst>
               <a:ext uri="{28A0092B-C50C-407E-A947-70E740481C1C}">
                 <a14:useLocalDpi xmlns:a14="http://schemas.microsoft.com/office/drawing/2010/main" val="0"/>
@@ -21637,13 +21236,6 @@
               </a:rPr>
               <a:t>需求分析</a:t>
             </a:r>
-            <a:endParaRPr lang="zh-CN" altLang="en-US" sz="3600" b="1" dirty="0">
-              <a:solidFill>
-                <a:schemeClr val="bg1"/>
-              </a:solidFill>
-              <a:latin typeface="等线" panose="02010600030101010101" pitchFamily="2" charset="-122"/>
-              <a:sym typeface="等线" panose="02010600030101010101" pitchFamily="2" charset="-122"/>
-            </a:endParaRPr>
           </a:p>
         </p:txBody>
       </p:sp>
@@ -21656,7 +21248,7 @@
           <p:nvPr/>
         </p:nvPicPr>
         <p:blipFill>
-          <a:blip r:embed="rId1" cstate="print">
+          <a:blip r:embed="rId3" cstate="print">
             <a:extLst>
               <a:ext uri="{28A0092B-C50C-407E-A947-70E740481C1C}">
                 <a14:useLocalDpi xmlns:a14="http://schemas.microsoft.com/office/drawing/2010/main" val="0"/>
@@ -21811,9 +21403,6 @@
               </a:rPr>
               <a:t>通信协议转换：跨服务调用时，协议转换</a:t>
             </a:r>
-            <a:endParaRPr lang="zh-CN" altLang="en-US" sz="1600" dirty="0">
-              <a:latin typeface="+mn-ea"/>
-            </a:endParaRPr>
           </a:p>
           <a:p>
             <a:pPr indent="-285750">
@@ -21835,9 +21424,6 @@
               </a:rPr>
               <a:t>动态插件管理：插件的编排组合、配置管理</a:t>
             </a:r>
-            <a:endParaRPr lang="zh-CN" altLang="en-US" sz="1600" dirty="0">
-              <a:latin typeface="+mn-ea"/>
-            </a:endParaRPr>
           </a:p>
           <a:p>
             <a:pPr indent="-285750">
@@ -21859,9 +21445,6 @@
               </a:rPr>
               <a:t>运维管理：服务及插件等信息查看管理</a:t>
             </a:r>
-            <a:endParaRPr lang="zh-CN" altLang="en-US" sz="1600" dirty="0">
-              <a:latin typeface="+mn-ea"/>
-            </a:endParaRPr>
           </a:p>
           <a:p>
             <a:pPr indent="-285750">
@@ -21883,9 +21466,6 @@
               </a:rPr>
               <a:t>监控管理：监控指标分析及报警通知</a:t>
             </a:r>
-            <a:endParaRPr lang="zh-CN" altLang="en-US" sz="1600" dirty="0">
-              <a:latin typeface="+mn-ea"/>
-            </a:endParaRPr>
           </a:p>
           <a:p>
             <a:pPr indent="-285750">
@@ -21999,9 +21579,6 @@
               </a:rPr>
               <a:t>易用性：注解配置、支持多注册中心、多种类型服务接入</a:t>
             </a:r>
-            <a:endParaRPr lang="zh-CN" altLang="en-US" sz="1600" dirty="0">
-              <a:latin typeface="+mn-ea"/>
-            </a:endParaRPr>
           </a:p>
           <a:p>
             <a:pPr indent="-285750">
@@ -22017,9 +21594,6 @@
               </a:rPr>
               <a:t>安全性：配置监控系统，实时告警通知</a:t>
             </a:r>
-            <a:endParaRPr lang="zh-CN" altLang="en-US" sz="1600" dirty="0">
-              <a:latin typeface="+mn-ea"/>
-            </a:endParaRPr>
           </a:p>
         </p:txBody>
       </p:sp>
@@ -22043,6 +21617,7 @@
           <a:bodyPr wrap="square" rtlCol="0" anchor="t">
             <a:spAutoFit/>
           </a:bodyPr>
+          <a:lstStyle/>
           <a:p>
             <a:pPr algn="l"/>
             <a:r>
@@ -22050,19 +21625,8 @@
                 <a:latin typeface="+mn-ea"/>
                 <a:sym typeface="+mn-ea"/>
               </a:rPr>
-              <a:t>系统</a:t>
-            </a:r>
-            <a:r>
-              <a:rPr lang="zh-CN" altLang="en-US" sz="1600" dirty="0">
-                <a:latin typeface="+mn-ea"/>
-                <a:sym typeface="+mn-ea"/>
-              </a:rPr>
-              <a:t>用例图</a:t>
-            </a:r>
-            <a:endParaRPr lang="zh-CN" altLang="en-US" sz="1600" dirty="0">
-              <a:latin typeface="+mn-ea"/>
-              <a:sym typeface="+mn-ea"/>
-            </a:endParaRPr>
+              <a:t>系统用例图</a:t>
+            </a:r>
           </a:p>
         </p:txBody>
       </p:sp>
@@ -22115,6 +21679,7 @@
         </p:style>
         <p:txBody>
           <a:bodyPr rtlCol="0" anchor="ctr"/>
+          <a:lstStyle/>
           <a:p>
             <a:pPr algn="ctr"/>
             <a:endParaRPr lang="zh-CN" altLang="en-US"/>
@@ -22170,6 +21735,7 @@
         </p:style>
         <p:txBody>
           <a:bodyPr rtlCol="0" anchor="ctr"/>
+          <a:lstStyle/>
           <a:p>
             <a:pPr algn="ctr"/>
             <a:endParaRPr lang="zh-CN" altLang="en-US"/>
@@ -22196,6 +21762,7 @@
           <a:bodyPr wrap="square" rtlCol="0">
             <a:spAutoFit/>
           </a:bodyPr>
+          <a:lstStyle/>
           <a:p>
             <a:pPr>
               <a:lnSpc>
@@ -22210,11 +21777,6 @@
               </a:rPr>
               <a:t>用例分析及需求</a:t>
             </a:r>
-            <a:endParaRPr lang="zh-CN" altLang="en-US" b="1" dirty="0">
-              <a:latin typeface="Microsoft YaHei UI" panose="020B0503020204020204" pitchFamily="34" charset="-122"/>
-              <a:ea typeface="Microsoft YaHei UI" panose="020B0503020204020204" pitchFamily="34" charset="-122"/>
-              <a:sym typeface="+mn-ea"/>
-            </a:endParaRPr>
           </a:p>
         </p:txBody>
       </p:sp>
@@ -22227,7 +21789,7 @@
           <p:nvPr/>
         </p:nvPicPr>
         <p:blipFill>
-          <a:blip r:embed="rId2"/>
+          <a:blip r:embed="rId4"/>
           <a:stretch>
             <a:fillRect/>
           </a:stretch>
@@ -22520,13 +22082,6 @@
               </a:rPr>
               <a:t>需求分析</a:t>
             </a:r>
-            <a:endParaRPr lang="zh-CN" altLang="en-US" sz="3600" b="1" dirty="0">
-              <a:solidFill>
-                <a:schemeClr val="bg1"/>
-              </a:solidFill>
-              <a:latin typeface="等线" panose="02010600030101010101" pitchFamily="2" charset="-122"/>
-              <a:sym typeface="等线" panose="02010600030101010101" pitchFamily="2" charset="-122"/>
-            </a:endParaRPr>
           </a:p>
         </p:txBody>
       </p:sp>
@@ -22539,7 +22094,7 @@
           <p:nvPr/>
         </p:nvPicPr>
         <p:blipFill>
-          <a:blip r:embed="rId1" cstate="print">
+          <a:blip r:embed="rId3" cstate="print">
             <a:extLst>
               <a:ext uri="{28A0092B-C50C-407E-A947-70E740481C1C}">
                 <a14:useLocalDpi xmlns:a14="http://schemas.microsoft.com/office/drawing/2010/main" val="0"/>
@@ -22580,6 +22135,7 @@
           <a:bodyPr wrap="square" rtlCol="0">
             <a:spAutoFit/>
           </a:bodyPr>
+          <a:lstStyle/>
           <a:p>
             <a:pPr>
               <a:lnSpc>
@@ -22594,11 +22150,6 @@
               </a:rPr>
               <a:t>业务基本流程</a:t>
             </a:r>
-            <a:endParaRPr lang="zh-CN" altLang="en-US" b="1" dirty="0">
-              <a:latin typeface="Microsoft YaHei UI" panose="020B0503020204020204" pitchFamily="34" charset="-122"/>
-              <a:ea typeface="Microsoft YaHei UI" panose="020B0503020204020204" pitchFamily="34" charset="-122"/>
-              <a:sym typeface="+mn-ea"/>
-            </a:endParaRPr>
           </a:p>
         </p:txBody>
       </p:sp>
@@ -22622,12 +22173,12 @@
           <a:bodyPr wrap="square" rtlCol="0">
             <a:noAutofit/>
           </a:bodyPr>
+          <a:lstStyle/>
           <a:p>
             <a:r>
               <a:rPr lang="zh-CN" altLang="en-US" b="1"/>
               <a:t>关键流程：</a:t>
             </a:r>
-            <a:endParaRPr lang="zh-CN" altLang="en-US" b="1"/>
           </a:p>
           <a:p>
             <a:endParaRPr lang="en-US" altLang="zh-CN"/>
@@ -22641,7 +22192,6 @@
               <a:rPr lang="zh-CN" altLang="en-US" sz="1600"/>
               <a:t>、开发人员定义插件并运行网关服务</a:t>
             </a:r>
-            <a:endParaRPr lang="zh-CN" altLang="en-US" sz="1600"/>
           </a:p>
           <a:p>
             <a:endParaRPr lang="zh-CN" altLang="en-US" sz="1600"/>
@@ -22663,7 +22213,6 @@
               <a:rPr lang="zh-CN" altLang="en-US" sz="1600"/>
               <a:t>并开发业务服务</a:t>
             </a:r>
-            <a:endParaRPr lang="zh-CN" altLang="en-US" sz="1600"/>
           </a:p>
           <a:p>
             <a:endParaRPr lang="zh-CN" altLang="en-US" sz="1600"/>
@@ -22685,7 +22234,6 @@
               <a:rPr lang="zh-CN" altLang="en-US" sz="1600"/>
               <a:t>接口配置规则</a:t>
             </a:r>
-            <a:endParaRPr lang="zh-CN" altLang="en-US" sz="1600"/>
           </a:p>
           <a:p>
             <a:endParaRPr lang="zh-CN" altLang="en-US" sz="1600"/>
@@ -22699,7 +22247,6 @@
               <a:rPr lang="zh-CN" altLang="en-US" sz="1600"/>
               <a:t>、请求用户请求网关，网关中间插件过滤并响应</a:t>
             </a:r>
-            <a:endParaRPr lang="zh-CN" altLang="en-US" sz="1600"/>
           </a:p>
           <a:p>
             <a:endParaRPr lang="zh-CN" altLang="en-US" sz="1600"/>
@@ -22713,7 +22260,6 @@
               <a:rPr lang="zh-CN" altLang="en-US" sz="1600"/>
               <a:t>、运维人员在运维管理后台及监控系统查看</a:t>
             </a:r>
-            <a:endParaRPr lang="zh-CN" altLang="en-US" sz="1600"/>
           </a:p>
         </p:txBody>
       </p:sp>
@@ -22726,7 +22272,7 @@
           <p:nvPr/>
         </p:nvPicPr>
         <p:blipFill>
-          <a:blip r:embed="rId2"/>
+          <a:blip r:embed="rId4"/>
           <a:stretch>
             <a:fillRect/>
           </a:stretch>
@@ -23248,14 +22794,6 @@
               </a:rPr>
               <a:t>System Design</a:t>
             </a:r>
-            <a:endParaRPr lang="en-US" altLang="zh-CN" sz="1600" b="1" dirty="0">
-              <a:solidFill>
-                <a:srgbClr val="6E0F6D"/>
-              </a:solidFill>
-              <a:latin typeface="+mn-ea"/>
-              <a:cs typeface="+mn-ea"/>
-              <a:sym typeface="+mn-lt"/>
-            </a:endParaRPr>
           </a:p>
         </p:txBody>
       </p:sp>
@@ -23290,13 +22828,6 @@
               </a:rPr>
               <a:t>系统设计</a:t>
             </a:r>
-            <a:endParaRPr lang="zh-CN" altLang="en-US" sz="4000" b="1" dirty="0">
-              <a:solidFill>
-                <a:srgbClr val="6E0F6D"/>
-              </a:solidFill>
-              <a:latin typeface="+mn-ea"/>
-              <a:cs typeface="+mn-ea"/>
-            </a:endParaRPr>
           </a:p>
         </p:txBody>
       </p:sp>
@@ -23436,7 +22967,7 @@
           <p:nvPr/>
         </p:nvPicPr>
         <p:blipFill>
-          <a:blip r:embed="rId4">
+          <a:blip r:embed="rId6">
             <a:extLst>
               <a:ext uri="{28A0092B-C50C-407E-A947-70E740481C1C}">
                 <a14:useLocalDpi xmlns:a14="http://schemas.microsoft.com/office/drawing/2010/main" val="0"/>
@@ -23466,98 +22997,91 @@
 </file>
 
 <file path=ppt/tags/tag1.xml><?xml version="1.0" encoding="utf-8"?>
-<p:tagLst xmlns:p="http://schemas.openxmlformats.org/presentationml/2006/main">
-  <p:tag name="KSO_WM_UNIT_HIGHLIGHT" val="0"/>
-  <p:tag name="KSO_WM_UNIT_COMPATIBLE" val="0"/>
-  <p:tag name="KSO_WM_UNIT_DIAGRAM_ISNUMVISUAL" val="0"/>
-  <p:tag name="KSO_WM_UNIT_DIAGRAM_ISREFERUNIT" val="0"/>
-  <p:tag name="KSO_WM_UNIT_ID" val="_3**"/>
-  <p:tag name="KSO_WM_UNIT_LAYERLEVEL" val="1"/>
-  <p:tag name="KSO_WM_TAG_VERSION" val="3.0"/>
-  <p:tag name="KSO_WM_BEAUTIFY_FLAG" val="#wm#"/>
+<p:tagLst xmlns:a="http://schemas.openxmlformats.org/drawingml/2006/main" xmlns:r="http://schemas.openxmlformats.org/officeDocument/2006/relationships" xmlns:p="http://schemas.openxmlformats.org/presentationml/2006/main">
+  <p:tag name="COMMONDATA" val="eyJoZGlkIjoiNTljNmJhMDIyMDk3OThiMWI2MDUyZjdjNjMzN2I5NTIifQ=="/>
 </p:tagLst>
 </file>
 
 <file path=ppt/tags/tag10.xml><?xml version="1.0" encoding="utf-8"?>
-<p:tagLst xmlns:p="http://schemas.openxmlformats.org/presentationml/2006/main">
+<p:tagLst xmlns:a="http://schemas.openxmlformats.org/drawingml/2006/main" xmlns:r="http://schemas.openxmlformats.org/officeDocument/2006/relationships" xmlns:p="http://schemas.openxmlformats.org/presentationml/2006/main">
+  <p:tag name="KSO_WM_BEAUTIFY_FLAG" val=""/>
+</p:tagLst>
+</file>
+
+<file path=ppt/tags/tag11.xml><?xml version="1.0" encoding="utf-8"?>
+<p:tagLst xmlns:a="http://schemas.openxmlformats.org/drawingml/2006/main" xmlns:r="http://schemas.openxmlformats.org/officeDocument/2006/relationships" xmlns:p="http://schemas.openxmlformats.org/presentationml/2006/main">
   <p:tag name="MH" val="20161022204031"/>
   <p:tag name="MH_LIBRARY" val="GRAPHIC"/>
   <p:tag name="MH_ORDER" val="文本框 2"/>
 </p:tagLst>
 </file>
 
-<file path=ppt/tags/tag11.xml><?xml version="1.0" encoding="utf-8"?>
-<p:tagLst xmlns:p="http://schemas.openxmlformats.org/presentationml/2006/main">
+<file path=ppt/tags/tag12.xml><?xml version="1.0" encoding="utf-8"?>
+<p:tagLst xmlns:a="http://schemas.openxmlformats.org/drawingml/2006/main" xmlns:r="http://schemas.openxmlformats.org/officeDocument/2006/relationships" xmlns:p="http://schemas.openxmlformats.org/presentationml/2006/main">
   <p:tag name="MH" val="20161022204031"/>
   <p:tag name="MH_LIBRARY" val="GRAPHIC"/>
   <p:tag name="MH_ORDER" val="文本框 11"/>
 </p:tagLst>
 </file>
 
-<file path=ppt/tags/tag12.xml><?xml version="1.0" encoding="utf-8"?>
-<p:tagLst xmlns:p="http://schemas.openxmlformats.org/presentationml/2006/main">
+<file path=ppt/tags/tag13.xml><?xml version="1.0" encoding="utf-8"?>
+<p:tagLst xmlns:a="http://schemas.openxmlformats.org/drawingml/2006/main" xmlns:r="http://schemas.openxmlformats.org/officeDocument/2006/relationships" xmlns:p="http://schemas.openxmlformats.org/presentationml/2006/main">
   <p:tag name="MH" val="20161022204031"/>
   <p:tag name="MH_LIBRARY" val="GRAPHIC"/>
   <p:tag name="MH_ORDER" val="Straight Connector 6"/>
 </p:tagLst>
 </file>
 
-<file path=ppt/tags/tag13.xml><?xml version="1.0" encoding="utf-8"?>
-<p:tagLst xmlns:p="http://schemas.openxmlformats.org/presentationml/2006/main">
+<file path=ppt/tags/tag14.xml><?xml version="1.0" encoding="utf-8"?>
+<p:tagLst xmlns:a="http://schemas.openxmlformats.org/drawingml/2006/main" xmlns:r="http://schemas.openxmlformats.org/officeDocument/2006/relationships" xmlns:p="http://schemas.openxmlformats.org/presentationml/2006/main">
   <p:tag name="MH" val="20161022204031"/>
   <p:tag name="MH_LIBRARY" val="GRAPHIC"/>
   <p:tag name="MH_ORDER" val="文本框 2"/>
 </p:tagLst>
 </file>
 
-<file path=ppt/tags/tag14.xml><?xml version="1.0" encoding="utf-8"?>
-<p:tagLst xmlns:p="http://schemas.openxmlformats.org/presentationml/2006/main">
+<file path=ppt/tags/tag15.xml><?xml version="1.0" encoding="utf-8"?>
+<p:tagLst xmlns:a="http://schemas.openxmlformats.org/drawingml/2006/main" xmlns:r="http://schemas.openxmlformats.org/officeDocument/2006/relationships" xmlns:p="http://schemas.openxmlformats.org/presentationml/2006/main">
   <p:tag name="MH" val="20161022204031"/>
   <p:tag name="MH_LIBRARY" val="GRAPHIC"/>
   <p:tag name="MH_ORDER" val="文本框 11"/>
 </p:tagLst>
 </file>
 
-<file path=ppt/tags/tag15.xml><?xml version="1.0" encoding="utf-8"?>
-<p:tagLst xmlns:p="http://schemas.openxmlformats.org/presentationml/2006/main">
+<file path=ppt/tags/tag16.xml><?xml version="1.0" encoding="utf-8"?>
+<p:tagLst xmlns:a="http://schemas.openxmlformats.org/drawingml/2006/main" xmlns:r="http://schemas.openxmlformats.org/officeDocument/2006/relationships" xmlns:p="http://schemas.openxmlformats.org/presentationml/2006/main">
   <p:tag name="MH" val="20161022204031"/>
   <p:tag name="MH_LIBRARY" val="GRAPHIC"/>
   <p:tag name="MH_ORDER" val="Straight Connector 6"/>
 </p:tagLst>
 </file>
 
-<file path=ppt/tags/tag16.xml><?xml version="1.0" encoding="utf-8"?>
-<p:tagLst xmlns:p="http://schemas.openxmlformats.org/presentationml/2006/main">
+<file path=ppt/tags/tag17.xml><?xml version="1.0" encoding="utf-8"?>
+<p:tagLst xmlns:a="http://schemas.openxmlformats.org/drawingml/2006/main" xmlns:r="http://schemas.openxmlformats.org/officeDocument/2006/relationships" xmlns:p="http://schemas.openxmlformats.org/presentationml/2006/main">
   <p:tag name="MH" val="20161022204031"/>
   <p:tag name="MH_LIBRARY" val="GRAPHIC"/>
   <p:tag name="MH_ORDER" val="文本框 2"/>
 </p:tagLst>
 </file>
 
-<file path=ppt/tags/tag17.xml><?xml version="1.0" encoding="utf-8"?>
-<p:tagLst xmlns:p="http://schemas.openxmlformats.org/presentationml/2006/main">
+<file path=ppt/tags/tag18.xml><?xml version="1.0" encoding="utf-8"?>
+<p:tagLst xmlns:a="http://schemas.openxmlformats.org/drawingml/2006/main" xmlns:r="http://schemas.openxmlformats.org/officeDocument/2006/relationships" xmlns:p="http://schemas.openxmlformats.org/presentationml/2006/main">
   <p:tag name="MH" val="20161022204031"/>
   <p:tag name="MH_LIBRARY" val="GRAPHIC"/>
   <p:tag name="MH_ORDER" val="文本框 11"/>
 </p:tagLst>
 </file>
 
-<file path=ppt/tags/tag18.xml><?xml version="1.0" encoding="utf-8"?>
-<p:tagLst xmlns:p="http://schemas.openxmlformats.org/presentationml/2006/main">
+<file path=ppt/tags/tag19.xml><?xml version="1.0" encoding="utf-8"?>
+<p:tagLst xmlns:a="http://schemas.openxmlformats.org/drawingml/2006/main" xmlns:r="http://schemas.openxmlformats.org/officeDocument/2006/relationships" xmlns:p="http://schemas.openxmlformats.org/presentationml/2006/main">
   <p:tag name="MH" val="20161022204031"/>
   <p:tag name="MH_LIBRARY" val="GRAPHIC"/>
   <p:tag name="MH_ORDER" val="Straight Connector 6"/>
 </p:tagLst>
 </file>
 
-<file path=ppt/tags/tag19.xml><?xml version="1.0" encoding="utf-8"?>
-<p:tagLst xmlns:p="http://schemas.openxmlformats.org/presentationml/2006/main">
-  <p:tag name="commondata" val="eyJoZGlkIjoiNTljNmJhMDIyMDk3OThiMWI2MDUyZjdjNjMzN2I5NTIifQ=="/>
-</p:tagLst>
-</file>
-
 <file path=ppt/tags/tag2.xml><?xml version="1.0" encoding="utf-8"?>
-<p:tagLst xmlns:p="http://schemas.openxmlformats.org/presentationml/2006/main">
+<p:tagLst xmlns:a="http://schemas.openxmlformats.org/drawingml/2006/main" xmlns:r="http://schemas.openxmlformats.org/officeDocument/2006/relationships" xmlns:p="http://schemas.openxmlformats.org/presentationml/2006/main">
   <p:tag name="KSO_WM_UNIT_HIGHLIGHT" val="0"/>
   <p:tag name="KSO_WM_UNIT_COMPATIBLE" val="0"/>
   <p:tag name="KSO_WM_UNIT_DIAGRAM_ISNUMVISUAL" val="0"/>
@@ -23570,7 +23094,7 @@
 </file>
 
 <file path=ppt/tags/tag3.xml><?xml version="1.0" encoding="utf-8"?>
-<p:tagLst xmlns:p="http://schemas.openxmlformats.org/presentationml/2006/main">
+<p:tagLst xmlns:a="http://schemas.openxmlformats.org/drawingml/2006/main" xmlns:r="http://schemas.openxmlformats.org/officeDocument/2006/relationships" xmlns:p="http://schemas.openxmlformats.org/presentationml/2006/main">
   <p:tag name="KSO_WM_UNIT_HIGHLIGHT" val="0"/>
   <p:tag name="KSO_WM_UNIT_COMPATIBLE" val="0"/>
   <p:tag name="KSO_WM_UNIT_DIAGRAM_ISNUMVISUAL" val="0"/>
@@ -23583,7 +23107,7 @@
 </file>
 
 <file path=ppt/tags/tag4.xml><?xml version="1.0" encoding="utf-8"?>
-<p:tagLst xmlns:p="http://schemas.openxmlformats.org/presentationml/2006/main">
+<p:tagLst xmlns:a="http://schemas.openxmlformats.org/drawingml/2006/main" xmlns:r="http://schemas.openxmlformats.org/officeDocument/2006/relationships" xmlns:p="http://schemas.openxmlformats.org/presentationml/2006/main">
   <p:tag name="KSO_WM_UNIT_HIGHLIGHT" val="0"/>
   <p:tag name="KSO_WM_UNIT_COMPATIBLE" val="0"/>
   <p:tag name="KSO_WM_UNIT_DIAGRAM_ISNUMVISUAL" val="0"/>
@@ -23596,7 +23120,7 @@
 </file>
 
 <file path=ppt/tags/tag5.xml><?xml version="1.0" encoding="utf-8"?>
-<p:tagLst xmlns:p="http://schemas.openxmlformats.org/presentationml/2006/main">
+<p:tagLst xmlns:a="http://schemas.openxmlformats.org/drawingml/2006/main" xmlns:r="http://schemas.openxmlformats.org/officeDocument/2006/relationships" xmlns:p="http://schemas.openxmlformats.org/presentationml/2006/main">
   <p:tag name="KSO_WM_UNIT_HIGHLIGHT" val="0"/>
   <p:tag name="KSO_WM_UNIT_COMPATIBLE" val="0"/>
   <p:tag name="KSO_WM_UNIT_DIAGRAM_ISNUMVISUAL" val="0"/>
@@ -23609,32 +23133,39 @@
 </file>
 
 <file path=ppt/tags/tag6.xml><?xml version="1.0" encoding="utf-8"?>
-<p:tagLst xmlns:p="http://schemas.openxmlformats.org/presentationml/2006/main">
+<p:tagLst xmlns:a="http://schemas.openxmlformats.org/drawingml/2006/main" xmlns:r="http://schemas.openxmlformats.org/officeDocument/2006/relationships" xmlns:p="http://schemas.openxmlformats.org/presentationml/2006/main">
+  <p:tag name="KSO_WM_UNIT_HIGHLIGHT" val="0"/>
+  <p:tag name="KSO_WM_UNIT_COMPATIBLE" val="0"/>
+  <p:tag name="KSO_WM_UNIT_DIAGRAM_ISNUMVISUAL" val="0"/>
+  <p:tag name="KSO_WM_UNIT_DIAGRAM_ISREFERUNIT" val="0"/>
+  <p:tag name="KSO_WM_UNIT_ID" val="_3**"/>
+  <p:tag name="KSO_WM_UNIT_LAYERLEVEL" val="1"/>
+  <p:tag name="KSO_WM_TAG_VERSION" val="3.0"/>
+  <p:tag name="KSO_WM_BEAUTIFY_FLAG" val="#wm#"/>
+</p:tagLst>
+</file>
+
+<file path=ppt/tags/tag7.xml><?xml version="1.0" encoding="utf-8"?>
+<p:tagLst xmlns:a="http://schemas.openxmlformats.org/drawingml/2006/main" xmlns:r="http://schemas.openxmlformats.org/officeDocument/2006/relationships" xmlns:p="http://schemas.openxmlformats.org/presentationml/2006/main">
   <p:tag name="MH" val="20161022204031"/>
   <p:tag name="MH_LIBRARY" val="GRAPHIC"/>
   <p:tag name="MH_ORDER" val="文本框 2"/>
 </p:tagLst>
 </file>
 
-<file path=ppt/tags/tag7.xml><?xml version="1.0" encoding="utf-8"?>
-<p:tagLst xmlns:p="http://schemas.openxmlformats.org/presentationml/2006/main">
+<file path=ppt/tags/tag8.xml><?xml version="1.0" encoding="utf-8"?>
+<p:tagLst xmlns:a="http://schemas.openxmlformats.org/drawingml/2006/main" xmlns:r="http://schemas.openxmlformats.org/officeDocument/2006/relationships" xmlns:p="http://schemas.openxmlformats.org/presentationml/2006/main">
   <p:tag name="MH" val="20161022204031"/>
   <p:tag name="MH_LIBRARY" val="GRAPHIC"/>
   <p:tag name="MH_ORDER" val="文本框 11"/>
 </p:tagLst>
 </file>
 
-<file path=ppt/tags/tag8.xml><?xml version="1.0" encoding="utf-8"?>
-<p:tagLst xmlns:p="http://schemas.openxmlformats.org/presentationml/2006/main">
+<file path=ppt/tags/tag9.xml><?xml version="1.0" encoding="utf-8"?>
+<p:tagLst xmlns:a="http://schemas.openxmlformats.org/drawingml/2006/main" xmlns:r="http://schemas.openxmlformats.org/officeDocument/2006/relationships" xmlns:p="http://schemas.openxmlformats.org/presentationml/2006/main">
   <p:tag name="MH" val="20161022204031"/>
   <p:tag name="MH_LIBRARY" val="GRAPHIC"/>
   <p:tag name="MH_ORDER" val="Straight Connector 6"/>
-</p:tagLst>
-</file>
-
-<file path=ppt/tags/tag9.xml><?xml version="1.0" encoding="utf-8"?>
-<p:tagLst xmlns:p="http://schemas.openxmlformats.org/presentationml/2006/main">
-  <p:tag name="KSO_WM_BEAUTIFY_FLAG" val=""/>
 </p:tagLst>
 </file>
 
@@ -23889,6 +23420,8 @@
       </a:bgFillStyleLst>
     </a:fmtScheme>
   </a:themeElements>
+  <a:objectDefaults/>
+  <a:extraClrSchemeLst/>
   <a:extLst>
     <a:ext uri="{05A4C25C-085E-4340-85A3-A5531E510DB2}">
       <thm15:themeFamily xmlns:thm15="http://schemas.microsoft.com/office/thememl/2012/main" name="Office Theme" id="{62F939B6-93AF-4DB8-9C6B-D6C7DFDC589F}" vid="{4A3C46E8-61CC-4603-A589-7422A47A8E4A}"/>
@@ -24148,6 +23681,8 @@
       </a:bgFillStyleLst>
     </a:fmtScheme>
   </a:themeElements>
+  <a:objectDefaults/>
+  <a:extraClrSchemeLst/>
   <a:extLst>
     <a:ext uri="{05A4C25C-085E-4340-85A3-A5531E510DB2}">
       <thm15:themeFamily xmlns:thm15="http://schemas.microsoft.com/office/thememl/2012/main" name="Office Theme" id="{62F939B6-93AF-4DB8-9C6B-D6C7DFDC589F}" vid="{4A3C46E8-61CC-4603-A589-7422A47A8E4A}"/>
